--- a/Planning docs/Teacher Slides/ss-5-01.04-claim-evidence-reasoning-slides.pptx
+++ b/Planning docs/Teacher Slides/ss-5-01.04-claim-evidence-reasoning-slides.pptx
@@ -4,6 +4,9 @@
   <p:sldMasterIdLst>
     <p:sldMasterId id="2147483648" r:id="rId1"/>
   </p:sldMasterIdLst>
+  <p:notesMasterIdLst>
+    <p:notesMasterId r:id="rId24"/>
+  </p:notesMasterIdLst>
   <p:sldIdLst>
     <p:sldId id="256" r:id="rId2"/>
     <p:sldId id="257" r:id="rId3"/>
@@ -28,10 +31,7 @@
     <p:sldId id="276" r:id="rId22"/>
     <p:sldId id="277" r:id="rId23"/>
   </p:sldIdLst>
-  <p:notesMasterIdLst>
-    <p:notesMasterId r:id="rId24"/>
-  </p:notesMasterIdLst>
-  <p:sldSz cx="9144000" cy="5143500"/>
+  <p:sldSz cx="9144000" cy="5143500" type="screen16x9"/>
   <p:notesSz cx="5143500" cy="9144000"/>
   <p:defaultTextStyle>
     <a:lvl1pPr marL="0" algn="l" defTabSz="914400" rtl="0" eaLnBrk="1" latinLnBrk="0" hangingPunct="1">
@@ -125,7 +125,41 @@
       </a:defRPr>
     </a:lvl9pPr>
   </p:defaultTextStyle>
+  <p:extLst>
+    <p:ext uri="{EFAFB233-063F-42B5-8137-9DF3F51BA10A}">
+      <p15:sldGuideLst xmlns:p15="http://schemas.microsoft.com/office/powerpoint/2012/main"/>
+    </p:ext>
+  </p:extLst>
 </p:presentation>
+</file>
+
+<file path=ppt/changesInfos/changesInfo1.xml><?xml version="1.0" encoding="utf-8"?>
+<pc:chgInfo xmlns:a="http://schemas.openxmlformats.org/drawingml/2006/main" xmlns:r="http://schemas.openxmlformats.org/officeDocument/2006/relationships" xmlns:ac="http://schemas.microsoft.com/office/drawing/2013/main/command" xmlns:pc="http://schemas.microsoft.com/office/powerpoint/2013/main/command">
+  <pc:docChgLst>
+    <pc:chgData name="Bethany Birchum" userId="b6e46c8f-0faa-466a-acc6-930e89db8bda" providerId="ADAL" clId="{AA9CE83A-CD8B-470A-8EAE-DE780D5C6D9C}"/>
+    <pc:docChg chg="modSld">
+      <pc:chgData name="Bethany Birchum" userId="b6e46c8f-0faa-466a-acc6-930e89db8bda" providerId="ADAL" clId="{AA9CE83A-CD8B-470A-8EAE-DE780D5C6D9C}" dt="2026-08-01T19:43:49.494" v="27" actId="20577"/>
+      <pc:docMkLst>
+        <pc:docMk/>
+      </pc:docMkLst>
+      <pc:sldChg chg="modSp mod">
+        <pc:chgData name="Bethany Birchum" userId="b6e46c8f-0faa-466a-acc6-930e89db8bda" providerId="ADAL" clId="{AA9CE83A-CD8B-470A-8EAE-DE780D5C6D9C}" dt="2026-08-01T19:43:49.494" v="27" actId="20577"/>
+        <pc:sldMkLst>
+          <pc:docMk/>
+          <pc:sldMk cId="0" sldId="256"/>
+        </pc:sldMkLst>
+        <pc:spChg chg="mod">
+          <ac:chgData name="Bethany Birchum" userId="b6e46c8f-0faa-466a-acc6-930e89db8bda" providerId="ADAL" clId="{AA9CE83A-CD8B-470A-8EAE-DE780D5C6D9C}" dt="2026-08-01T19:43:49.494" v="27" actId="20577"/>
+          <ac:spMkLst>
+            <pc:docMk/>
+            <pc:sldMk cId="0" sldId="256"/>
+            <ac:spMk id="11" creationId="{00000000-0000-0000-0000-000000000000}"/>
+          </ac:spMkLst>
+        </pc:spChg>
+      </pc:sldChg>
+    </pc:docChg>
+  </pc:docChgLst>
+</pc:chgInfo>
 </file>
 
 <file path=ppt/notesMasters/notesMaster1.xml><?xml version="1.0" encoding="utf-8"?>
@@ -150,234 +184,10 @@
           <a:chExt cx="0" cy="0"/>
         </a:xfrm>
       </p:grpSpPr>
-      <p:sp>
-        <p:nvSpPr>
-          <p:cNvPr id="2" name="Header Placeholder 1"/>
-          <p:cNvSpPr>
-            <a:spLocks noGrp="1"/>
-          </p:cNvSpPr>
-          <p:nvPr>
-            <p:ph type="hdr" sz="quarter"/>
-          </p:nvPr>
-        </p:nvSpPr>
-        <p:spPr>
-          <a:xfrm>
-            <a:off x="0" y="0"/>
-            <a:ext cx="2971800" cy="458788"/>
-          </a:xfrm>
-          <a:prstGeom prst="rect">
-            <a:avLst/>
-          </a:prstGeom>
-        </p:spPr>
-        <p:txBody>
-          <a:bodyPr vert="horz" lIns="91440" tIns="45720" rIns="91440" bIns="45720" rtlCol="0"/>
-          <a:lstStyle>
-            <a:lvl1pPr algn="l">
-              <a:defRPr sz="1200"/>
-            </a:lvl1pPr>
-          </a:lstStyle>
-          <a:p>
-            <a:endParaRPr lang="en-US"/>
-          </a:p>
-        </p:txBody>
-      </p:sp>
-      <p:sp>
-        <p:nvSpPr>
-          <p:cNvPr id="3" name="Date Placeholder 2"/>
-          <p:cNvSpPr>
-            <a:spLocks noGrp="1"/>
-          </p:cNvSpPr>
-          <p:nvPr>
-            <p:ph type="dt" idx="1"/>
-          </p:nvPr>
-        </p:nvSpPr>
-        <p:spPr>
-          <a:xfrm>
-            <a:off x="3884613" y="0"/>
-            <a:ext cx="2971800" cy="458788"/>
-          </a:xfrm>
-          <a:prstGeom prst="rect">
-            <a:avLst/>
-          </a:prstGeom>
-        </p:spPr>
-        <p:txBody>
-          <a:bodyPr vert="horz" lIns="91440" tIns="45720" rIns="91440" bIns="45720" rtlCol="0"/>
-          <a:lstStyle>
-            <a:lvl1pPr algn="r">
-              <a:defRPr sz="1200"/>
-            </a:lvl1pPr>
-          </a:lstStyle>
-          <a:p>
-            <a:fld id="{5282F153-3F37-0F45-9E97-73ACFA13230C}" type="datetimeFigureOut">
-              <a:rPr lang="en-US"/>
-              <a:t>7/23/19</a:t>
-            </a:fld>
-            <a:endParaRPr lang="en-US"/>
-          </a:p>
-        </p:txBody>
-      </p:sp>
-      <p:sp>
-        <p:nvSpPr>
-          <p:cNvPr id="4" name="Slide Image Placeholder 3"/>
-          <p:cNvSpPr>
-            <a:spLocks noGrp="1" noRot="1" noChangeAspect="1"/>
-          </p:cNvSpPr>
-          <p:nvPr>
-            <p:ph type="sldImg" idx="2"/>
-          </p:nvPr>
-        </p:nvSpPr>
-        <p:spPr>
-          <a:xfrm>
-            <a:off x="685800" y="1143000"/>
-            <a:ext cx="5486400" cy="3086100"/>
-          </a:xfrm>
-          <a:prstGeom prst="rect">
-            <a:avLst/>
-          </a:prstGeom>
-          <a:noFill/>
-          <a:ln w="12700">
-            <a:solidFill>
-              <a:prstClr val="black"/>
-            </a:solidFill>
-          </a:ln>
-        </p:spPr>
-        <p:txBody>
-          <a:bodyPr vert="horz" lIns="91440" tIns="45720" rIns="91440" bIns="45720" rtlCol="0" anchor="ctr"/>
-          <a:lstStyle/>
-          <a:p>
-            <a:endParaRPr lang="en-US"/>
-          </a:p>
-        </p:txBody>
-      </p:sp>
-      <p:sp>
-        <p:nvSpPr>
-          <p:cNvPr id="5" name="Notes Placeholder 4"/>
-          <p:cNvSpPr>
-            <a:spLocks noGrp="1"/>
-          </p:cNvSpPr>
-          <p:nvPr>
-            <p:ph type="body" sz="quarter" idx="3"/>
-          </p:nvPr>
-        </p:nvSpPr>
-        <p:spPr>
-          <a:xfrm>
-            <a:off x="685800" y="4400550"/>
-            <a:ext cx="5486400" cy="3600450"/>
-          </a:xfrm>
-          <a:prstGeom prst="rect">
-            <a:avLst/>
-          </a:prstGeom>
-        </p:spPr>
-        <p:txBody>
-          <a:bodyPr vert="horz" lIns="91440" tIns="45720" rIns="91440" bIns="45720" rtlCol="0"/>
-          <a:lstStyle/>
-          <a:p>
-            <a:pPr lvl="0"/>
-            <a:r>
-              <a:rPr lang="en-US"/>
-              <a:t>Click to edit Master text styles</a:t>
-            </a:r>
-          </a:p>
-          <a:p>
-            <a:pPr lvl="1"/>
-            <a:r>
-              <a:rPr lang="en-US"/>
-              <a:t>Second level</a:t>
-            </a:r>
-          </a:p>
-          <a:p>
-            <a:pPr lvl="2"/>
-            <a:r>
-              <a:rPr lang="en-US"/>
-              <a:t>Third level</a:t>
-            </a:r>
-          </a:p>
-          <a:p>
-            <a:pPr lvl="3"/>
-            <a:r>
-              <a:rPr lang="en-US"/>
-              <a:t>Fourth level</a:t>
-            </a:r>
-          </a:p>
-          <a:p>
-            <a:pPr lvl="4"/>
-            <a:r>
-              <a:rPr lang="en-US"/>
-              <a:t>Fifth level</a:t>
-            </a:r>
-          </a:p>
-        </p:txBody>
-      </p:sp>
-      <p:sp>
-        <p:nvSpPr>
-          <p:cNvPr id="6" name="Footer Placeholder 5"/>
-          <p:cNvSpPr>
-            <a:spLocks noGrp="1"/>
-          </p:cNvSpPr>
-          <p:nvPr>
-            <p:ph type="ftr" sz="quarter" idx="4"/>
-          </p:nvPr>
-        </p:nvSpPr>
-        <p:spPr>
-          <a:xfrm>
-            <a:off x="0" y="8685213"/>
-            <a:ext cx="2971800" cy="458787"/>
-          </a:xfrm>
-          <a:prstGeom prst="rect">
-            <a:avLst/>
-          </a:prstGeom>
-        </p:spPr>
-        <p:txBody>
-          <a:bodyPr vert="horz" lIns="91440" tIns="45720" rIns="91440" bIns="45720" rtlCol="0" anchor="b"/>
-          <a:lstStyle>
-            <a:lvl1pPr algn="l">
-              <a:defRPr sz="1200"/>
-            </a:lvl1pPr>
-          </a:lstStyle>
-          <a:p>
-            <a:endParaRPr lang="en-US"/>
-          </a:p>
-        </p:txBody>
-      </p:sp>
-      <p:sp>
-        <p:nvSpPr>
-          <p:cNvPr id="7" name="Slide Number Placeholder 6"/>
-          <p:cNvSpPr>
-            <a:spLocks noGrp="1"/>
-          </p:cNvSpPr>
-          <p:nvPr>
-            <p:ph type="sldNum" sz="quarter" idx="5"/>
-          </p:nvPr>
-        </p:nvSpPr>
-        <p:spPr>
-          <a:xfrm>
-            <a:off x="3884613" y="8685213"/>
-            <a:ext cx="2971800" cy="458787"/>
-          </a:xfrm>
-          <a:prstGeom prst="rect">
-            <a:avLst/>
-          </a:prstGeom>
-        </p:spPr>
-        <p:txBody>
-          <a:bodyPr vert="horz" lIns="91440" tIns="45720" rIns="91440" bIns="45720" rtlCol="0" anchor="b"/>
-          <a:lstStyle>
-            <a:lvl1pPr algn="r">
-              <a:defRPr sz="1200"/>
-            </a:lvl1pPr>
-          </a:lstStyle>
-          <a:p>
-            <a:fld id="{CE5E9CC1-C706-0F49-92D6-E571CC5EEA8F}" type="slidenum">
-              <a:rPr lang="en-US"/>
-              <a:t>‹#›</a:t>
-            </a:fld>
-            <a:endParaRPr lang="en-US"/>
-          </a:p>
-        </p:txBody>
-      </p:sp>
     </p:spTree>
     <p:extLst>
       <p:ext uri="{BB962C8B-B14F-4D97-AF65-F5344CB8AC3E}">
-        <p14:creationId xmlns:p14="http://schemas.microsoft.com/office/powerpoint/2010/main" val="1024086991"/>
+        <p14:creationId xmlns:p14="http://schemas.microsoft.com/office/powerpoint/2010/main" val="302458742"/>
       </p:ext>
     </p:extLst>
   </p:cSld>
@@ -526,7 +336,6 @@
               <a:t>IMAGE TO INSERT: Grand colonial printing press interior — warm candlelight, ink-stained broadside on the press table, early American newspaper setting, dramatic and inviting moodWelcome Junior Editors to the Republic Gazette newsroom. Today's lesson is 5.01.04 — Claim, Evidence, and Reasoning in Social Studies. The Hasty Herald has made a bold claim. Our job as editors is to investigate whether they're right.
 IMAGE TO INSERT: Grand colonial printing press interior — warm candlelight, ink-stained broadside on the press table, early American newspaper setting, dramatic and inviting mood</a:t>
             </a:r>
-            <a:endParaRPr lang="en-US" dirty="0"/>
           </a:p>
         </p:txBody>
       </p:sp>
@@ -614,7 +423,6 @@
               <a:rPr lang="en-US" dirty="0"/>
               <a:t>Direct preparation for Notebook Q1. The exact question wording will appear again on the assignment slide. Students who engage with this discussion now will write much stronger notebook answers. After the chat frame, ask: 'What would a Hasty Herald editor say if they only had an opinion?' to keep the story frame alive.</a:t>
             </a:r>
-            <a:endParaRPr lang="en-US" dirty="0"/>
           </a:p>
         </p:txBody>
       </p:sp>
@@ -702,7 +510,6 @@
               <a:rPr lang="en-US" dirty="0"/>
               <a:t>Students are rehearsing the answer to Notebook Q2 here. After discussion, say: 'In a few minutes you'll write this down — so make sure you can say WHICH part is weak and HOW you know.' Strong chat responses here become strong notebook entries.</a:t>
             </a:r>
-            <a:endParaRPr lang="en-US" dirty="0"/>
           </a:p>
         </p:txBody>
       </p:sp>
@@ -790,7 +597,6 @@
               <a:rPr lang="en-US" dirty="0"/>
               <a:t>The intellectual core of the lesson. Students should reach: 'The Herald is right that you start with a position, but wrong that that's enough.' This is steelman reasoning — a higher-order skill. Celebrate students who can defend the Herald's partial correctness. The Herald's claim is wrong, but it's not stupid.</a:t>
             </a:r>
-            <a:endParaRPr lang="en-US" dirty="0"/>
           </a:p>
         </p:txBody>
       </p:sp>
@@ -878,7 +684,6 @@
               <a:rPr lang="en-US" dirty="0"/>
               <a:t>Bridge from concept to practice. The transferable pattern: students can apply CER in history, geography, economics, and civics. Ask: 'Where else might this rule apply beyond newspapers? Where do people need to prove claims with evidence and reasoning?'</a:t>
             </a:r>
-            <a:endParaRPr lang="en-US" dirty="0"/>
           </a:p>
         </p:txBody>
       </p:sp>
@@ -967,7 +772,6 @@
               <a:t>IMAGE TO INSERT: Simple quill pen resting on a blank broadside — candlelight, contemplative mood, the moment before an editor decides whether to print a story. Dark, honest, quiet. No dramatic action.Pause here. Ask: 'What is the connection between honesty and CER?' Let students answer. Key idea: you can be completely sincere and still be dishonest in print if you skip evidence or reasoning. Honesty in journalism means accountability to the evidence, not just to your own belief.
 IMAGE TO INSERT: Simple quill pen resting on a blank broadside — candlelight, contemplative mood, the moment before an editor decides whether to print a story. Dark, honest, quiet.</a:t>
             </a:r>
-            <a:endParaRPr lang="en-US" dirty="0"/>
           </a:p>
         </p:txBody>
       </p:sp>
@@ -1055,7 +859,6 @@
               <a:rPr lang="en-US" dirty="0"/>
               <a:t>Think aloud through each row. For Claim: 'I answered the question directly.' For Evidence: 'I named a specific source and specific detail.' For Reasoning: 'I told the reader WHY that evidence proves my claim.' After each row, pause and ask: 'What did I just do?'</a:t>
             </a:r>
-            <a:endParaRPr lang="en-US" dirty="0"/>
           </a:p>
         </p:txBody>
       </p:sp>
@@ -1143,7 +946,6 @@
               <a:rPr lang="en-US" dirty="0"/>
               <a:t>Collect chat responses and build a class CER response together. Write the class claim in the chat or whiteboard. Then push for evidence: 'What specific event or source could we use?' Then reasoning: 'Why does that prove what we said?' Build all three before moving on.</a:t>
             </a:r>
-            <a:endParaRPr lang="en-US" dirty="0"/>
           </a:p>
         </p:txBody>
       </p:sp>
@@ -1231,7 +1033,6 @@
               <a:rPr lang="en-US" dirty="0"/>
               <a:t>Students should identify: no specific claim (just 'geography is important'), no specific evidence (just 'maps show'), no reasoning at all ('that tells us something' is not reasoning). All three CER parts are vague or absent. Do not tell them — let them find it.</a:t>
             </a:r>
-            <a:endParaRPr lang="en-US" dirty="0"/>
           </a:p>
         </p:txBody>
       </p:sp>
@@ -1319,7 +1120,6 @@
               <a:rPr lang="en-US" dirty="0"/>
               <a:t>Give 2 minutes for students to write a revised version in the chat. Look for: specific arguable claim; named source or specific detail; genuine 'because' statement connecting evidence to claim. Read 2-3 examples aloud — ask the class 'Is this Gazette-ready?'</a:t>
             </a:r>
-            <a:endParaRPr lang="en-US" dirty="0"/>
           </a:p>
         </p:txBody>
       </p:sp>
@@ -1407,7 +1207,6 @@
               <a:rPr lang="en-US" dirty="0"/>
               <a:t>The answer here is legitimately both — and that is the point. Reasoning always involves judgment, which is why it can be evaluated and challenged. Celebrate students who hold both positions simultaneously. This is an honest reflection of how historical interpretation works.</a:t>
             </a:r>
-            <a:endParaRPr lang="en-US" dirty="0"/>
           </a:p>
         </p:txBody>
       </p:sp>
@@ -1495,7 +1294,6 @@
               <a:rPr lang="en-US" dirty="0"/>
               <a:t>Give students 30 seconds to read the Herald headline. Then open the Chat Frame. Do NOT tell them what is wrong yet. The Herald is not entirely wrong — a strong opinion is often where claims START. The problem is stopping there. Let students sense this tension before naming it.</a:t>
             </a:r>
-            <a:endParaRPr lang="en-US" dirty="0"/>
           </a:p>
         </p:txBody>
       </p:sp>
@@ -1583,7 +1381,6 @@
               <a:rPr lang="en-US" dirty="0"/>
               <a:t>Ask students to unmute and answer each question before revealing the answer box. Pause after each question for 10 seconds. This is a low-stakes retrieval check — celebrate correct answers and gently correct misconceptions before the assignment.</a:t>
             </a:r>
-            <a:endParaRPr lang="en-US" dirty="0"/>
           </a:p>
         </p:txBody>
       </p:sp>
@@ -1671,7 +1468,6 @@
               <a:rPr lang="en-US" dirty="0"/>
               <a:t>Walk through each notebook question and remind students: 'You've already talked through all three of these today — now you write your answers.' Point to the Gazette Correction: 'This is where you correct the Herald using all three CER parts.' Read the Archive Line prompt aloud — make it feel important. This goes in the Gazette archive.</a:t>
             </a:r>
-            <a:endParaRPr lang="en-US" dirty="0"/>
           </a:p>
         </p:txBody>
       </p:sp>
@@ -1760,7 +1556,6 @@
               <a:t>IMAGE TO INSERT: A colonial printing press rolling off the final copy of The Republic Gazette — candlelight, satisfied editor reviewing the proof, triumphant mood. Warm gold tones with deep navy shadows.Celebrate the class. Say: 'The Herald printed without checking. We checked. That is the difference between the Herald and the Gazette.' Read the teaser aloud and build suspense: 'What do YOU think -- are latitude and longitude just numbers? Come ready to debate the Herald next time.'
 IMAGE TO INSERT: A colonial printing press rolling off the final copy of The Republic Gazette — candlelight, satisfied editor reviewing the proof, triumphant mood. Warm gold tones with deep navy shadows.</a:t>
             </a:r>
-            <a:endParaRPr lang="en-US" dirty="0"/>
           </a:p>
         </p:txBody>
       </p:sp>
@@ -1848,7 +1643,6 @@
               <a:rPr lang="en-US" dirty="0"/>
               <a:t>Read the dispatch aloud or have a student read it. Pause after 'three things' — do not name them yet. Say: 'Ms. Avery mentioned three things the Gazette always checks. Just notice — do you already have a guess about what they might be?'</a:t>
             </a:r>
-            <a:endParaRPr lang="en-US" dirty="0"/>
           </a:p>
         </p:txBody>
       </p:sp>
@@ -1936,7 +1730,6 @@
               <a:rPr lang="en-US" dirty="0"/>
               <a:t>Give 30 seconds of silent reading. Students type their chat frame response. Do NOT reveal CER yet. Listen for students who sense that Argument B has something Argument A is missing. The words 'evidence' and 'reasoning' do not need to come from you yet.</a:t>
             </a:r>
-            <a:endParaRPr lang="en-US" dirty="0"/>
           </a:p>
         </p:txBody>
       </p:sp>
@@ -2024,7 +1817,6 @@
               <a:rPr lang="en-US" dirty="0"/>
               <a:t>This is the first real conceptual turn. Push hard on the confidence question — many students conflate confidence with correctness. The key distinction: both start with a position, but a claim goes further. Students who sense this are ready for the CER reveal.</a:t>
             </a:r>
-            <a:endParaRPr lang="en-US" dirty="0"/>
           </a:p>
         </p:txBody>
       </p:sp>
@@ -2113,7 +1905,6 @@
               <a:t>IMAGE TO INSERT: Clean dark editorial desk with three labeled folders labeled Claim, Evidence, Reasoning — arranged side by side, dramatic overhead candlelight, early American newspaper aestheticThe big reveal. Students named the three parts — now they see it has a name: CER. Read the rule at the bottom aloud slowly. Ask: which of those three errors is the Herald making? (Reasoning without evidence — a hunch.) This connects back to Slide 2.
 IMAGE TO INSERT: Clean dark editorial desk with three labeled folders: Claim, Evidence, Reasoning — arranged side by side, dramatic overhead candlelight, early American newspaper aesthetic</a:t>
             </a:r>
-            <a:endParaRPr lang="en-US" dirty="0"/>
           </a:p>
         </p:txBody>
       </p:sp>
@@ -2201,7 +1992,6 @@
               <a:rPr lang="en-US" dirty="0"/>
               <a:t>Walk through each row. Ask students which part does the heavy lifting — most will say Evidence, but push them: without Reasoning, the evidence just sits there. The Reasoning is the editor's voice connecting the dots.</a:t>
             </a:r>
-            <a:endParaRPr lang="en-US" dirty="0"/>
           </a:p>
         </p:txBody>
       </p:sp>
@@ -2290,7 +2080,6 @@
               <a:t>IMAGE TO INSERT: Early American newspaper editorial broadside (1770s-1830s). Political argument — taxation, representation, or colonial rights. The broadside has a visible claim and some factual evidence, but the reasoning (the 'why this evidence proves the claim' link) is absent or very weak. Aged paper texture, colonial typeface, printed in black ink.
 Give 45 seconds of silent observation. After the timer: 'What is this document doing? What is it trying to argue?' Do not use the word CER yet.</a:t>
             </a:r>
-            <a:endParaRPr lang="en-US" dirty="0"/>
           </a:p>
         </p:txBody>
       </p:sp>
@@ -2378,7 +2167,6 @@
               <a:rPr lang="en-US" dirty="0"/>
               <a:t>Students are doing source evaluation here, not just classification. Push them: 'Where exactly in the broadside do you see the reasoning? If you can not point to it, it may be missing.' This prepares students for Notebook Q2 — they will answer this question in writing on the assignment slide.</a:t>
             </a:r>
-            <a:endParaRPr lang="en-US" dirty="0"/>
           </a:p>
         </p:txBody>
       </p:sp>
@@ -2451,6 +2239,11 @@
 <file path=ppt/slideMasters/slideMaster1.xml><?xml version="1.0" encoding="utf-8"?>
 <p:sldMaster xmlns:a="http://schemas.openxmlformats.org/drawingml/2006/main" xmlns:r="http://schemas.openxmlformats.org/officeDocument/2006/relationships" xmlns:p="http://schemas.openxmlformats.org/presentationml/2006/main">
   <p:cSld>
+    <p:bg>
+      <p:bgRef idx="1001">
+        <a:schemeClr val="bg1"/>
+      </p:bgRef>
+    </p:bg>
     <p:spTree>
       <p:nvGrpSpPr>
         <p:cNvPr id="1" name=""/>
@@ -2766,6 +2559,13 @@
             <a:prstDash val="dash"/>
           </a:ln>
         </p:spPr>
+        <p:txBody>
+          <a:bodyPr/>
+          <a:lstStyle/>
+          <a:p>
+            <a:endParaRPr lang="en-US"/>
+          </a:p>
+        </p:txBody>
       </p:sp>
       <p:sp>
         <p:nvSpPr>
@@ -2788,6 +2588,13 @@
           </a:solidFill>
           <a:ln/>
         </p:spPr>
+        <p:txBody>
+          <a:bodyPr/>
+          <a:lstStyle/>
+          <a:p>
+            <a:endParaRPr lang="en-US"/>
+          </a:p>
+        </p:txBody>
       </p:sp>
       <p:sp>
         <p:nvSpPr>
@@ -2815,6 +2622,13 @@
             <a:prstDash val="solid"/>
           </a:ln>
         </p:spPr>
+        <p:txBody>
+          <a:bodyPr/>
+          <a:lstStyle/>
+          <a:p>
+            <a:endParaRPr lang="en-US"/>
+          </a:p>
+        </p:txBody>
       </p:sp>
       <p:sp>
         <p:nvSpPr>
@@ -2837,11 +2651,11 @@
           <a:bodyPr wrap="square" rtlCol="0" anchor="ctr"/>
           <a:lstStyle/>
           <a:p>
-            <a:pPr algn="ctr" indent="0" marL="0">
-              <a:buNone/>
-            </a:pPr>
-            <a:r>
-              <a:rPr lang="en-US" sz="1800" b="1" spc="200" kern="0" dirty="0">
+            <a:pPr marL="0" indent="0" algn="ctr">
+              <a:buNone/>
+            </a:pPr>
+            <a:r>
+              <a:rPr lang="en-US" sz="1800" b="1" kern="0" spc="200" dirty="0">
                 <a:solidFill>
                   <a:srgbClr val="FFFFFF"/>
                 </a:solidFill>
@@ -2876,7 +2690,7 @@
           <a:bodyPr wrap="square" rtlCol="0" anchor="ctr"/>
           <a:lstStyle/>
           <a:p>
-            <a:pPr algn="ctr" indent="0" marL="0">
+            <a:pPr marL="0" indent="0" algn="ctr">
               <a:buNone/>
             </a:pPr>
             <a:r>
@@ -2893,7 +2707,7 @@
             <a:endParaRPr lang="en-US" sz="3200" dirty="0"/>
           </a:p>
           <a:p>
-            <a:pPr algn="ctr" indent="0" marL="0">
+            <a:pPr marL="0" indent="0" algn="ctr">
               <a:buNone/>
             </a:pPr>
             <a:r>
@@ -2935,6 +2749,13 @@
             <a:prstDash val="solid"/>
           </a:ln>
         </p:spPr>
+        <p:txBody>
+          <a:bodyPr/>
+          <a:lstStyle/>
+          <a:p>
+            <a:endParaRPr lang="en-US"/>
+          </a:p>
+        </p:txBody>
       </p:sp>
       <p:sp>
         <p:nvSpPr>
@@ -2964,6 +2785,13 @@
             <a:prstDash val="solid"/>
           </a:ln>
         </p:spPr>
+        <p:txBody>
+          <a:bodyPr/>
+          <a:lstStyle/>
+          <a:p>
+            <a:endParaRPr lang="en-US"/>
+          </a:p>
+        </p:txBody>
       </p:sp>
       <p:sp>
         <p:nvSpPr>
@@ -2986,11 +2814,11 @@
           <a:bodyPr wrap="square" rtlCol="0" anchor="ctr"/>
           <a:lstStyle/>
           <a:p>
-            <a:pPr indent="0" marL="0">
-              <a:buNone/>
-            </a:pPr>
-            <a:r>
-              <a:rPr lang="en-US" sz="900" b="1" spc="150" kern="0" dirty="0">
+            <a:pPr marL="0" indent="0">
+              <a:buNone/>
+            </a:pPr>
+            <a:r>
+              <a:rPr lang="en-US" sz="900" b="1" kern="0" spc="150" dirty="0">
                 <a:solidFill>
                   <a:srgbClr val="55C8E8"/>
                 </a:solidFill>
@@ -3025,11 +2853,11 @@
           <a:bodyPr wrap="square" rtlCol="0" anchor="ctr"/>
           <a:lstStyle/>
           <a:p>
-            <a:pPr indent="0" marL="0">
-              <a:buNone/>
-            </a:pPr>
-            <a:r>
-              <a:rPr lang="en-US" sz="1300" i="1" dirty="0">
+            <a:pPr marL="0" indent="0">
+              <a:buNone/>
+            </a:pPr>
+            <a:r>
+              <a:rPr lang="en-US" sz="1300" i="1">
                 <a:solidFill>
                   <a:srgbClr val="FFF3DC"/>
                 </a:solidFill>
@@ -3037,7 +2865,18 @@
                 <a:ea typeface="Cambria" pitchFamily="34" charset="-122"/>
                 <a:cs typeface="Cambria" pitchFamily="34" charset="-120"/>
               </a:rPr>
-              <a:t>"Opinion Is All You Need! A strong opinion is enough for a newspaper claim."</a:t>
+              <a:t>"Opinion </a:t>
+            </a:r>
+            <a:r>
+              <a:rPr lang="en-US" sz="1300" i="1" dirty="0">
+                <a:solidFill>
+                  <a:srgbClr val="FFF3DC"/>
+                </a:solidFill>
+                <a:latin typeface="Cambria" pitchFamily="34" charset="0"/>
+                <a:ea typeface="Cambria" pitchFamily="34" charset="-122"/>
+                <a:cs typeface="Cambria" pitchFamily="34" charset="-120"/>
+              </a:rPr>
+              <a:t>Is All You Need! A strong opinion is enough for a newspaper claim."</a:t>
             </a:r>
             <a:endParaRPr lang="en-US" sz="1300" dirty="0"/>
           </a:p>
@@ -3071,6 +2910,13 @@
             <a:prstDash val="solid"/>
           </a:ln>
         </p:spPr>
+        <p:txBody>
+          <a:bodyPr/>
+          <a:lstStyle/>
+          <a:p>
+            <a:endParaRPr lang="en-US"/>
+          </a:p>
+        </p:txBody>
       </p:sp>
       <p:sp>
         <p:nvSpPr>
@@ -3093,7 +2939,7 @@
           <a:bodyPr wrap="square" rtlCol="0" anchor="ctr"/>
           <a:lstStyle/>
           <a:p>
-            <a:pPr indent="0" marL="0">
+            <a:pPr marL="0" indent="0">
               <a:buNone/>
             </a:pPr>
             <a:r>
@@ -3132,7 +2978,7 @@
           <a:bodyPr wrap="square" rtlCol="0" anchor="ctr"/>
           <a:lstStyle/>
           <a:p>
-            <a:pPr algn="ctr" indent="0" marL="0">
+            <a:pPr marL="0" indent="0" algn="ctr">
               <a:buNone/>
             </a:pPr>
             <a:r>
@@ -3199,6 +3045,13 @@
             <a:prstDash val="solid"/>
           </a:ln>
         </p:spPr>
+        <p:txBody>
+          <a:bodyPr/>
+          <a:lstStyle/>
+          <a:p>
+            <a:endParaRPr lang="en-US"/>
+          </a:p>
+        </p:txBody>
       </p:sp>
       <p:sp>
         <p:nvSpPr>
@@ -3221,11 +3074,11 @@
           <a:bodyPr wrap="square" rtlCol="0" anchor="ctr"/>
           <a:lstStyle/>
           <a:p>
-            <a:pPr indent="0" marL="0">
-              <a:buNone/>
-            </a:pPr>
-            <a:r>
-              <a:rPr lang="en-US" sz="1000" b="1" spc="150" kern="0" dirty="0">
+            <a:pPr marL="0" indent="0">
+              <a:buNone/>
+            </a:pPr>
+            <a:r>
+              <a:rPr lang="en-US" sz="1000" b="1" kern="0" spc="150" dirty="0">
                 <a:solidFill>
                   <a:srgbClr val="8B6FC0"/>
                 </a:solidFill>
@@ -3263,6 +3116,13 @@
             <a:prstDash val="solid"/>
           </a:ln>
         </p:spPr>
+        <p:txBody>
+          <a:bodyPr/>
+          <a:lstStyle/>
+          <a:p>
+            <a:endParaRPr lang="en-US"/>
+          </a:p>
+        </p:txBody>
       </p:sp>
       <p:sp>
         <p:nvSpPr>
@@ -3290,6 +3150,13 @@
             <a:prstDash val="solid"/>
           </a:ln>
         </p:spPr>
+        <p:txBody>
+          <a:bodyPr/>
+          <a:lstStyle/>
+          <a:p>
+            <a:endParaRPr lang="en-US"/>
+          </a:p>
+        </p:txBody>
       </p:sp>
       <p:sp>
         <p:nvSpPr>
@@ -3312,11 +3179,11 @@
           <a:bodyPr wrap="square" rtlCol="0" anchor="ctr"/>
           <a:lstStyle/>
           <a:p>
-            <a:pPr indent="0" marL="0">
-              <a:buNone/>
-            </a:pPr>
-            <a:r>
-              <a:rPr lang="en-US" sz="900" b="1" spc="150" kern="0" dirty="0">
+            <a:pPr marL="0" indent="0">
+              <a:buNone/>
+            </a:pPr>
+            <a:r>
+              <a:rPr lang="en-US" sz="900" b="1" kern="0" spc="150" dirty="0">
                 <a:solidFill>
                   <a:srgbClr val="55C8E8"/>
                 </a:solidFill>
@@ -3351,7 +3218,7 @@
           <a:bodyPr wrap="square" rtlCol="0" anchor="ctr"/>
           <a:lstStyle/>
           <a:p>
-            <a:pPr indent="0" marL="0">
+            <a:pPr marL="0" indent="0">
               <a:buNone/>
             </a:pPr>
             <a:r>
@@ -3390,7 +3257,7 @@
           <a:bodyPr wrap="square" rtlCol="0" anchor="ctr"/>
           <a:lstStyle/>
           <a:p>
-            <a:pPr indent="0" marL="0">
+            <a:pPr marL="0" indent="0">
               <a:buNone/>
             </a:pPr>
             <a:r>
@@ -3434,6 +3301,13 @@
             <a:prstDash val="solid"/>
           </a:ln>
         </p:spPr>
+        <p:txBody>
+          <a:bodyPr/>
+          <a:lstStyle/>
+          <a:p>
+            <a:endParaRPr lang="en-US"/>
+          </a:p>
+        </p:txBody>
       </p:sp>
       <p:sp>
         <p:nvSpPr>
@@ -3456,11 +3330,11 @@
           <a:bodyPr wrap="square" lIns="0" tIns="0" rIns="0" bIns="0" rtlCol="0" anchor="ctr"/>
           <a:lstStyle/>
           <a:p>
-            <a:pPr indent="0" marL="0">
-              <a:buNone/>
-            </a:pPr>
-            <a:r>
-              <a:rPr lang="en-US" sz="900" b="1" spc="150" kern="0" dirty="0">
+            <a:pPr marL="0" indent="0">
+              <a:buNone/>
+            </a:pPr>
+            <a:r>
+              <a:rPr lang="en-US" sz="900" b="1" kern="0" spc="150" dirty="0">
                 <a:solidFill>
                   <a:srgbClr val="55C8E8"/>
                 </a:solidFill>
@@ -3495,7 +3369,7 @@
           <a:bodyPr wrap="square" lIns="0" tIns="0" rIns="0" bIns="0" rtlCol="0" anchor="t"/>
           <a:lstStyle/>
           <a:p>
-            <a:pPr indent="0" marL="0">
+            <a:pPr marL="0" indent="0">
               <a:spcAft>
                 <a:spcPts val="400"/>
               </a:spcAft>
@@ -3515,7 +3389,7 @@
             <a:endParaRPr lang="en-US" sz="1100" dirty="0"/>
           </a:p>
           <a:p>
-            <a:pPr indent="0" marL="0">
+            <a:pPr marL="0" indent="0">
               <a:spcAft>
                 <a:spcPts val="400"/>
               </a:spcAft>
@@ -3535,7 +3409,7 @@
             <a:endParaRPr lang="en-US" sz="1100" dirty="0"/>
           </a:p>
           <a:p>
-            <a:pPr indent="0" marL="0">
+            <a:pPr marL="0" indent="0">
               <a:spcAft>
                 <a:spcPts val="400"/>
               </a:spcAft>
@@ -3555,7 +3429,7 @@
             <a:endParaRPr lang="en-US" sz="1100" dirty="0"/>
           </a:p>
           <a:p>
-            <a:pPr indent="0" marL="0">
+            <a:pPr marL="0" indent="0">
               <a:spcAft>
                 <a:spcPts val="400"/>
               </a:spcAft>
@@ -3602,6 +3476,13 @@
             <a:prstDash val="solid"/>
           </a:ln>
         </p:spPr>
+        <p:txBody>
+          <a:bodyPr/>
+          <a:lstStyle/>
+          <a:p>
+            <a:endParaRPr lang="en-US"/>
+          </a:p>
+        </p:txBody>
       </p:sp>
       <p:sp>
         <p:nvSpPr>
@@ -3624,11 +3505,11 @@
           <a:bodyPr wrap="square" lIns="0" tIns="0" rIns="0" bIns="0" rtlCol="0" anchor="ctr"/>
           <a:lstStyle/>
           <a:p>
-            <a:pPr indent="0" marL="0">
-              <a:buNone/>
-            </a:pPr>
-            <a:r>
-              <a:rPr lang="en-US" sz="900" b="1" spc="150" kern="0" dirty="0">
+            <a:pPr marL="0" indent="0">
+              <a:buNone/>
+            </a:pPr>
+            <a:r>
+              <a:rPr lang="en-US" sz="900" b="1" kern="0" spc="150" dirty="0">
                 <a:solidFill>
                   <a:srgbClr val="D4943A"/>
                 </a:solidFill>
@@ -3663,7 +3544,7 @@
           <a:bodyPr wrap="square" lIns="0" tIns="0" rIns="0" bIns="0" rtlCol="0" anchor="t"/>
           <a:lstStyle/>
           <a:p>
-            <a:pPr indent="0" marL="0">
+            <a:pPr marL="0" indent="0">
               <a:spcAft>
                 <a:spcPts val="500"/>
               </a:spcAft>
@@ -3683,7 +3564,7 @@
             <a:endParaRPr lang="en-US" sz="1200" dirty="0"/>
           </a:p>
           <a:p>
-            <a:pPr indent="0" marL="0">
+            <a:pPr marL="0" indent="0">
               <a:spcAft>
                 <a:spcPts val="500"/>
               </a:spcAft>
@@ -3753,6 +3634,13 @@
             <a:prstDash val="solid"/>
           </a:ln>
         </p:spPr>
+        <p:txBody>
+          <a:bodyPr/>
+          <a:lstStyle/>
+          <a:p>
+            <a:endParaRPr lang="en-US"/>
+          </a:p>
+        </p:txBody>
       </p:sp>
       <p:sp>
         <p:nvSpPr>
@@ -3775,11 +3663,11 @@
           <a:bodyPr wrap="square" rtlCol="0" anchor="ctr"/>
           <a:lstStyle/>
           <a:p>
-            <a:pPr indent="0" marL="0">
-              <a:buNone/>
-            </a:pPr>
-            <a:r>
-              <a:rPr lang="en-US" sz="1000" b="1" spc="150" kern="0" dirty="0">
+            <a:pPr marL="0" indent="0">
+              <a:buNone/>
+            </a:pPr>
+            <a:r>
+              <a:rPr lang="en-US" sz="1000" b="1" kern="0" spc="150" dirty="0">
                 <a:solidFill>
                   <a:srgbClr val="8B6FC0"/>
                 </a:solidFill>
@@ -3817,6 +3705,13 @@
             <a:prstDash val="solid"/>
           </a:ln>
         </p:spPr>
+        <p:txBody>
+          <a:bodyPr/>
+          <a:lstStyle/>
+          <a:p>
+            <a:endParaRPr lang="en-US"/>
+          </a:p>
+        </p:txBody>
       </p:sp>
       <p:sp>
         <p:nvSpPr>
@@ -3844,6 +3739,13 @@
             <a:prstDash val="solid"/>
           </a:ln>
         </p:spPr>
+        <p:txBody>
+          <a:bodyPr/>
+          <a:lstStyle/>
+          <a:p>
+            <a:endParaRPr lang="en-US"/>
+          </a:p>
+        </p:txBody>
       </p:sp>
       <p:sp>
         <p:nvSpPr>
@@ -3866,11 +3768,11 @@
           <a:bodyPr wrap="square" rtlCol="0" anchor="ctr"/>
           <a:lstStyle/>
           <a:p>
-            <a:pPr indent="0" marL="0">
-              <a:buNone/>
-            </a:pPr>
-            <a:r>
-              <a:rPr lang="en-US" sz="900" b="1" spc="150" kern="0" dirty="0">
+            <a:pPr marL="0" indent="0">
+              <a:buNone/>
+            </a:pPr>
+            <a:r>
+              <a:rPr lang="en-US" sz="900" b="1" kern="0" spc="150" dirty="0">
                 <a:solidFill>
                   <a:srgbClr val="55C8E8"/>
                 </a:solidFill>
@@ -3905,7 +3807,7 @@
           <a:bodyPr wrap="square" rtlCol="0" anchor="ctr"/>
           <a:lstStyle/>
           <a:p>
-            <a:pPr indent="0" marL="0">
+            <a:pPr marL="0" indent="0">
               <a:buNone/>
             </a:pPr>
             <a:r>
@@ -3944,7 +3846,7 @@
           <a:bodyPr wrap="square" rtlCol="0" anchor="ctr"/>
           <a:lstStyle/>
           <a:p>
-            <a:pPr indent="0" marL="0">
+            <a:pPr marL="0" indent="0">
               <a:buNone/>
             </a:pPr>
             <a:r>
@@ -3988,6 +3890,13 @@
             <a:prstDash val="solid"/>
           </a:ln>
         </p:spPr>
+        <p:txBody>
+          <a:bodyPr/>
+          <a:lstStyle/>
+          <a:p>
+            <a:endParaRPr lang="en-US"/>
+          </a:p>
+        </p:txBody>
       </p:sp>
       <p:sp>
         <p:nvSpPr>
@@ -4010,11 +3919,11 @@
           <a:bodyPr wrap="square" lIns="0" tIns="0" rIns="0" bIns="0" rtlCol="0" anchor="ctr"/>
           <a:lstStyle/>
           <a:p>
-            <a:pPr indent="0" marL="0">
-              <a:buNone/>
-            </a:pPr>
-            <a:r>
-              <a:rPr lang="en-US" sz="900" b="1" spc="150" kern="0" dirty="0">
+            <a:pPr marL="0" indent="0">
+              <a:buNone/>
+            </a:pPr>
+            <a:r>
+              <a:rPr lang="en-US" sz="900" b="1" kern="0" spc="150" dirty="0">
                 <a:solidFill>
                   <a:srgbClr val="55C8E8"/>
                 </a:solidFill>
@@ -4049,7 +3958,7 @@
           <a:bodyPr wrap="square" lIns="0" tIns="0" rIns="0" bIns="0" rtlCol="0" anchor="t"/>
           <a:lstStyle/>
           <a:p>
-            <a:pPr indent="0" marL="0">
+            <a:pPr marL="0" indent="0">
               <a:spcAft>
                 <a:spcPts val="400"/>
               </a:spcAft>
@@ -4069,7 +3978,7 @@
             <a:endParaRPr lang="en-US" sz="1100" dirty="0"/>
           </a:p>
           <a:p>
-            <a:pPr indent="0" marL="0">
+            <a:pPr marL="0" indent="0">
               <a:spcAft>
                 <a:spcPts val="400"/>
               </a:spcAft>
@@ -4089,7 +3998,7 @@
             <a:endParaRPr lang="en-US" sz="1100" dirty="0"/>
           </a:p>
           <a:p>
-            <a:pPr indent="0" marL="0">
+            <a:pPr marL="0" indent="0">
               <a:spcAft>
                 <a:spcPts val="400"/>
               </a:spcAft>
@@ -4109,7 +4018,7 @@
             <a:endParaRPr lang="en-US" sz="1100" dirty="0"/>
           </a:p>
           <a:p>
-            <a:pPr indent="0" marL="0">
+            <a:pPr marL="0" indent="0">
               <a:spcAft>
                 <a:spcPts val="400"/>
               </a:spcAft>
@@ -4156,6 +4065,13 @@
             <a:prstDash val="solid"/>
           </a:ln>
         </p:spPr>
+        <p:txBody>
+          <a:bodyPr/>
+          <a:lstStyle/>
+          <a:p>
+            <a:endParaRPr lang="en-US"/>
+          </a:p>
+        </p:txBody>
       </p:sp>
       <p:sp>
         <p:nvSpPr>
@@ -4178,11 +4094,11 @@
           <a:bodyPr wrap="square" lIns="0" tIns="0" rIns="0" bIns="0" rtlCol="0" anchor="ctr"/>
           <a:lstStyle/>
           <a:p>
-            <a:pPr indent="0" marL="0">
-              <a:buNone/>
-            </a:pPr>
-            <a:r>
-              <a:rPr lang="en-US" sz="900" b="1" spc="150" kern="0" dirty="0">
+            <a:pPr marL="0" indent="0">
+              <a:buNone/>
+            </a:pPr>
+            <a:r>
+              <a:rPr lang="en-US" sz="900" b="1" kern="0" spc="150" dirty="0">
                 <a:solidFill>
                   <a:srgbClr val="D4943A"/>
                 </a:solidFill>
@@ -4217,7 +4133,7 @@
           <a:bodyPr wrap="square" lIns="0" tIns="0" rIns="0" bIns="0" rtlCol="0" anchor="t"/>
           <a:lstStyle/>
           <a:p>
-            <a:pPr indent="0" marL="0">
+            <a:pPr marL="0" indent="0">
               <a:spcAft>
                 <a:spcPts val="500"/>
               </a:spcAft>
@@ -4237,7 +4153,7 @@
             <a:endParaRPr lang="en-US" sz="1200" dirty="0"/>
           </a:p>
           <a:p>
-            <a:pPr indent="0" marL="0">
+            <a:pPr marL="0" indent="0">
               <a:spcAft>
                 <a:spcPts val="500"/>
               </a:spcAft>
@@ -4284,6 +4200,13 @@
             <a:prstDash val="solid"/>
           </a:ln>
         </p:spPr>
+        <p:txBody>
+          <a:bodyPr/>
+          <a:lstStyle/>
+          <a:p>
+            <a:endParaRPr lang="en-US"/>
+          </a:p>
+        </p:txBody>
       </p:sp>
       <p:sp>
         <p:nvSpPr>
@@ -4306,7 +4229,7 @@
           <a:bodyPr wrap="square" rtlCol="0" anchor="ctr"/>
           <a:lstStyle/>
           <a:p>
-            <a:pPr indent="0" marL="0">
+            <a:pPr marL="0" indent="0">
               <a:buNone/>
             </a:pPr>
             <a:r>
@@ -4373,6 +4296,13 @@
             <a:prstDash val="solid"/>
           </a:ln>
         </p:spPr>
+        <p:txBody>
+          <a:bodyPr/>
+          <a:lstStyle/>
+          <a:p>
+            <a:endParaRPr lang="en-US"/>
+          </a:p>
+        </p:txBody>
       </p:sp>
       <p:sp>
         <p:nvSpPr>
@@ -4395,11 +4325,11 @@
           <a:bodyPr wrap="square" rtlCol="0" anchor="ctr"/>
           <a:lstStyle/>
           <a:p>
-            <a:pPr indent="0" marL="0">
-              <a:buNone/>
-            </a:pPr>
-            <a:r>
-              <a:rPr lang="en-US" sz="1000" b="1" spc="150" kern="0" dirty="0">
+            <a:pPr marL="0" indent="0">
+              <a:buNone/>
+            </a:pPr>
+            <a:r>
+              <a:rPr lang="en-US" sz="1000" b="1" kern="0" spc="150" dirty="0">
                 <a:solidFill>
                   <a:srgbClr val="8B6FC0"/>
                 </a:solidFill>
@@ -4437,6 +4367,13 @@
             <a:prstDash val="solid"/>
           </a:ln>
         </p:spPr>
+        <p:txBody>
+          <a:bodyPr/>
+          <a:lstStyle/>
+          <a:p>
+            <a:endParaRPr lang="en-US"/>
+          </a:p>
+        </p:txBody>
       </p:sp>
       <p:sp>
         <p:nvSpPr>
@@ -4464,6 +4401,13 @@
             <a:prstDash val="solid"/>
           </a:ln>
         </p:spPr>
+        <p:txBody>
+          <a:bodyPr/>
+          <a:lstStyle/>
+          <a:p>
+            <a:endParaRPr lang="en-US"/>
+          </a:p>
+        </p:txBody>
       </p:sp>
       <p:sp>
         <p:nvSpPr>
@@ -4486,11 +4430,11 @@
           <a:bodyPr wrap="square" rtlCol="0" anchor="ctr"/>
           <a:lstStyle/>
           <a:p>
-            <a:pPr indent="0" marL="0">
-              <a:buNone/>
-            </a:pPr>
-            <a:r>
-              <a:rPr lang="en-US" sz="900" b="1" spc="150" kern="0" dirty="0">
+            <a:pPr marL="0" indent="0">
+              <a:buNone/>
+            </a:pPr>
+            <a:r>
+              <a:rPr lang="en-US" sz="900" b="1" kern="0" spc="150" dirty="0">
                 <a:solidFill>
                   <a:srgbClr val="D4943A"/>
                 </a:solidFill>
@@ -4525,7 +4469,7 @@
           <a:bodyPr wrap="square" rtlCol="0" anchor="ctr"/>
           <a:lstStyle/>
           <a:p>
-            <a:pPr indent="0" marL="0">
+            <a:pPr marL="0" indent="0">
               <a:buNone/>
             </a:pPr>
             <a:r>
@@ -4564,7 +4508,7 @@
           <a:bodyPr wrap="square" rtlCol="0" anchor="ctr"/>
           <a:lstStyle/>
           <a:p>
-            <a:pPr indent="0" marL="0">
+            <a:pPr marL="0" indent="0">
               <a:buNone/>
             </a:pPr>
             <a:r>
@@ -4608,6 +4552,13 @@
             <a:prstDash val="solid"/>
           </a:ln>
         </p:spPr>
+        <p:txBody>
+          <a:bodyPr/>
+          <a:lstStyle/>
+          <a:p>
+            <a:endParaRPr lang="en-US"/>
+          </a:p>
+        </p:txBody>
       </p:sp>
       <p:sp>
         <p:nvSpPr>
@@ -4630,11 +4581,11 @@
           <a:bodyPr wrap="square" lIns="0" tIns="0" rIns="0" bIns="0" rtlCol="0" anchor="ctr"/>
           <a:lstStyle/>
           <a:p>
-            <a:pPr indent="0" marL="0">
-              <a:buNone/>
-            </a:pPr>
-            <a:r>
-              <a:rPr lang="en-US" sz="900" b="1" spc="150" kern="0" dirty="0">
+            <a:pPr marL="0" indent="0">
+              <a:buNone/>
+            </a:pPr>
+            <a:r>
+              <a:rPr lang="en-US" sz="900" b="1" kern="0" spc="150" dirty="0">
                 <a:solidFill>
                   <a:srgbClr val="55C8E8"/>
                 </a:solidFill>
@@ -4669,7 +4620,7 @@
           <a:bodyPr wrap="square" lIns="0" tIns="0" rIns="0" bIns="0" rtlCol="0" anchor="t"/>
           <a:lstStyle/>
           <a:p>
-            <a:pPr indent="0" marL="0">
+            <a:pPr marL="0" indent="0">
               <a:spcAft>
                 <a:spcPts val="400"/>
               </a:spcAft>
@@ -4689,7 +4640,7 @@
             <a:endParaRPr lang="en-US" sz="1100" dirty="0"/>
           </a:p>
           <a:p>
-            <a:pPr indent="0" marL="0">
+            <a:pPr marL="0" indent="0">
               <a:spcAft>
                 <a:spcPts val="400"/>
               </a:spcAft>
@@ -4709,7 +4660,7 @@
             <a:endParaRPr lang="en-US" sz="1100" dirty="0"/>
           </a:p>
           <a:p>
-            <a:pPr indent="0" marL="0">
+            <a:pPr marL="0" indent="0">
               <a:spcAft>
                 <a:spcPts val="400"/>
               </a:spcAft>
@@ -4729,7 +4680,7 @@
             <a:endParaRPr lang="en-US" sz="1100" dirty="0"/>
           </a:p>
           <a:p>
-            <a:pPr indent="0" marL="0">
+            <a:pPr marL="0" indent="0">
               <a:spcAft>
                 <a:spcPts val="400"/>
               </a:spcAft>
@@ -4776,6 +4727,13 @@
             <a:prstDash val="solid"/>
           </a:ln>
         </p:spPr>
+        <p:txBody>
+          <a:bodyPr/>
+          <a:lstStyle/>
+          <a:p>
+            <a:endParaRPr lang="en-US"/>
+          </a:p>
+        </p:txBody>
       </p:sp>
       <p:sp>
         <p:nvSpPr>
@@ -4798,11 +4756,11 @@
           <a:bodyPr wrap="square" lIns="0" tIns="0" rIns="0" bIns="0" rtlCol="0" anchor="ctr"/>
           <a:lstStyle/>
           <a:p>
-            <a:pPr indent="0" marL="0">
-              <a:buNone/>
-            </a:pPr>
-            <a:r>
-              <a:rPr lang="en-US" sz="900" b="1" spc="150" kern="0" dirty="0">
+            <a:pPr marL="0" indent="0">
+              <a:buNone/>
+            </a:pPr>
+            <a:r>
+              <a:rPr lang="en-US" sz="900" b="1" kern="0" spc="150" dirty="0">
                 <a:solidFill>
                   <a:srgbClr val="D4943A"/>
                 </a:solidFill>
@@ -4837,7 +4795,7 @@
           <a:bodyPr wrap="square" lIns="0" tIns="0" rIns="0" bIns="0" rtlCol="0" anchor="t"/>
           <a:lstStyle/>
           <a:p>
-            <a:pPr indent="0" marL="0">
+            <a:pPr marL="0" indent="0">
               <a:spcAft>
                 <a:spcPts val="500"/>
               </a:spcAft>
@@ -4857,7 +4815,7 @@
             <a:endParaRPr lang="en-US" sz="1200" dirty="0"/>
           </a:p>
           <a:p>
-            <a:pPr indent="0" marL="0">
+            <a:pPr marL="0" indent="0">
               <a:spcAft>
                 <a:spcPts val="500"/>
               </a:spcAft>
@@ -4927,6 +4885,13 @@
             <a:prstDash val="solid"/>
           </a:ln>
         </p:spPr>
+        <p:txBody>
+          <a:bodyPr/>
+          <a:lstStyle/>
+          <a:p>
+            <a:endParaRPr lang="en-US"/>
+          </a:p>
+        </p:txBody>
       </p:sp>
       <p:sp>
         <p:nvSpPr>
@@ -4949,11 +4914,11 @@
           <a:bodyPr wrap="square" rtlCol="0" anchor="ctr"/>
           <a:lstStyle/>
           <a:p>
-            <a:pPr indent="0" marL="0">
-              <a:buNone/>
-            </a:pPr>
-            <a:r>
-              <a:rPr lang="en-US" sz="1000" b="1" spc="150" kern="0" dirty="0">
+            <a:pPr marL="0" indent="0">
+              <a:buNone/>
+            </a:pPr>
+            <a:r>
+              <a:rPr lang="en-US" sz="1000" b="1" kern="0" spc="150" dirty="0">
                 <a:solidFill>
                   <a:srgbClr val="0E1C42"/>
                 </a:solidFill>
@@ -4991,6 +4956,13 @@
             <a:prstDash val="solid"/>
           </a:ln>
         </p:spPr>
+        <p:txBody>
+          <a:bodyPr/>
+          <a:lstStyle/>
+          <a:p>
+            <a:endParaRPr lang="en-US"/>
+          </a:p>
+        </p:txBody>
       </p:sp>
       <p:sp>
         <p:nvSpPr>
@@ -5018,6 +4990,13 @@
             <a:prstDash val="solid"/>
           </a:ln>
         </p:spPr>
+        <p:txBody>
+          <a:bodyPr/>
+          <a:lstStyle/>
+          <a:p>
+            <a:endParaRPr lang="en-US"/>
+          </a:p>
+        </p:txBody>
       </p:sp>
       <p:sp>
         <p:nvSpPr>
@@ -5040,7 +5019,7 @@
           <a:bodyPr wrap="square" rtlCol="0" anchor="ctr"/>
           <a:lstStyle/>
           <a:p>
-            <a:pPr algn="ctr" indent="0" marL="0">
+            <a:pPr marL="0" indent="0" algn="ctr">
               <a:buNone/>
             </a:pPr>
             <a:r>
@@ -5079,7 +5058,7 @@
           <a:bodyPr wrap="square" rtlCol="0" anchor="ctr"/>
           <a:lstStyle/>
           <a:p>
-            <a:pPr algn="ctr" indent="0" marL="0">
+            <a:pPr marL="0" indent="0" algn="ctr">
               <a:buNone/>
             </a:pPr>
             <a:r>
@@ -5118,7 +5097,7 @@
           <a:bodyPr wrap="square" rtlCol="0" anchor="t"/>
           <a:lstStyle/>
           <a:p>
-            <a:pPr indent="0" marL="0">
+            <a:pPr marL="0" indent="0">
               <a:buNone/>
             </a:pPr>
             <a:r>
@@ -5162,6 +5141,13 @@
             <a:prstDash val="solid"/>
           </a:ln>
         </p:spPr>
+        <p:txBody>
+          <a:bodyPr/>
+          <a:lstStyle/>
+          <a:p>
+            <a:endParaRPr lang="en-US"/>
+          </a:p>
+        </p:txBody>
       </p:sp>
       <p:sp>
         <p:nvSpPr>
@@ -5184,7 +5170,7 @@
           <a:bodyPr wrap="square" rtlCol="0" anchor="ctr"/>
           <a:lstStyle/>
           <a:p>
-            <a:pPr algn="ctr" indent="0" marL="0">
+            <a:pPr marL="0" indent="0" algn="ctr">
               <a:buNone/>
             </a:pPr>
             <a:r>
@@ -5223,7 +5209,7 @@
           <a:bodyPr wrap="square" rtlCol="0" anchor="ctr"/>
           <a:lstStyle/>
           <a:p>
-            <a:pPr algn="ctr" indent="0" marL="0">
+            <a:pPr marL="0" indent="0" algn="ctr">
               <a:buNone/>
             </a:pPr>
             <a:r>
@@ -5262,7 +5248,7 @@
           <a:bodyPr wrap="square" rtlCol="0" anchor="t"/>
           <a:lstStyle/>
           <a:p>
-            <a:pPr indent="0" marL="0">
+            <a:pPr marL="0" indent="0">
               <a:buNone/>
             </a:pPr>
             <a:r>
@@ -5306,6 +5292,13 @@
             <a:prstDash val="solid"/>
           </a:ln>
         </p:spPr>
+        <p:txBody>
+          <a:bodyPr/>
+          <a:lstStyle/>
+          <a:p>
+            <a:endParaRPr lang="en-US"/>
+          </a:p>
+        </p:txBody>
       </p:sp>
       <p:sp>
         <p:nvSpPr>
@@ -5328,7 +5321,7 @@
           <a:bodyPr wrap="square" rtlCol="0" anchor="ctr"/>
           <a:lstStyle/>
           <a:p>
-            <a:pPr algn="ctr" indent="0" marL="0">
+            <a:pPr marL="0" indent="0" algn="ctr">
               <a:buNone/>
             </a:pPr>
             <a:r>
@@ -5367,7 +5360,7 @@
           <a:bodyPr wrap="square" rtlCol="0" anchor="ctr"/>
           <a:lstStyle/>
           <a:p>
-            <a:pPr algn="ctr" indent="0" marL="0">
+            <a:pPr marL="0" indent="0" algn="ctr">
               <a:buNone/>
             </a:pPr>
             <a:r>
@@ -5406,7 +5399,7 @@
           <a:bodyPr wrap="square" rtlCol="0" anchor="t"/>
           <a:lstStyle/>
           <a:p>
-            <a:pPr indent="0" marL="0">
+            <a:pPr marL="0" indent="0">
               <a:buNone/>
             </a:pPr>
             <a:r>
@@ -5450,6 +5443,13 @@
             <a:prstDash val="solid"/>
           </a:ln>
         </p:spPr>
+        <p:txBody>
+          <a:bodyPr/>
+          <a:lstStyle/>
+          <a:p>
+            <a:endParaRPr lang="en-US"/>
+          </a:p>
+        </p:txBody>
       </p:sp>
       <p:sp>
         <p:nvSpPr>
@@ -5472,7 +5472,7 @@
           <a:bodyPr wrap="square" rtlCol="0" anchor="ctr"/>
           <a:lstStyle/>
           <a:p>
-            <a:pPr algn="ctr" indent="0" marL="0">
+            <a:pPr marL="0" indent="0" algn="ctr">
               <a:buNone/>
             </a:pPr>
             <a:r>
@@ -5516,6 +5516,13 @@
             <a:prstDash val="solid"/>
           </a:ln>
         </p:spPr>
+        <p:txBody>
+          <a:bodyPr/>
+          <a:lstStyle/>
+          <a:p>
+            <a:endParaRPr lang="en-US"/>
+          </a:p>
+        </p:txBody>
       </p:sp>
       <p:sp>
         <p:nvSpPr>
@@ -5538,11 +5545,11 @@
           <a:bodyPr wrap="square" lIns="0" tIns="0" rIns="0" bIns="0" rtlCol="0" anchor="ctr"/>
           <a:lstStyle/>
           <a:p>
-            <a:pPr indent="0" marL="0">
-              <a:buNone/>
-            </a:pPr>
-            <a:r>
-              <a:rPr lang="en-US" sz="900" b="1" spc="150" kern="0" dirty="0">
+            <a:pPr marL="0" indent="0">
+              <a:buNone/>
+            </a:pPr>
+            <a:r>
+              <a:rPr lang="en-US" sz="900" b="1" kern="0" spc="150" dirty="0">
                 <a:solidFill>
                   <a:srgbClr val="D4943A"/>
                 </a:solidFill>
@@ -5577,7 +5584,7 @@
           <a:bodyPr wrap="square" lIns="0" tIns="0" rIns="0" bIns="0" rtlCol="0" anchor="t"/>
           <a:lstStyle/>
           <a:p>
-            <a:pPr indent="0" marL="0">
+            <a:pPr marL="0" indent="0">
               <a:spcAft>
                 <a:spcPts val="500"/>
               </a:spcAft>
@@ -5647,6 +5654,13 @@
             <a:prstDash val="dash"/>
           </a:ln>
         </p:spPr>
+        <p:txBody>
+          <a:bodyPr/>
+          <a:lstStyle/>
+          <a:p>
+            <a:endParaRPr lang="en-US"/>
+          </a:p>
+        </p:txBody>
       </p:sp>
       <p:sp>
         <p:nvSpPr>
@@ -5669,6 +5683,13 @@
           </a:solidFill>
           <a:ln/>
         </p:spPr>
+        <p:txBody>
+          <a:bodyPr/>
+          <a:lstStyle/>
+          <a:p>
+            <a:endParaRPr lang="en-US"/>
+          </a:p>
+        </p:txBody>
       </p:sp>
       <p:sp>
         <p:nvSpPr>
@@ -5691,11 +5712,11 @@
           <a:bodyPr wrap="square" rtlCol="0" anchor="ctr"/>
           <a:lstStyle/>
           <a:p>
-            <a:pPr algn="ctr" indent="0" marL="0">
-              <a:buNone/>
-            </a:pPr>
-            <a:r>
-              <a:rPr lang="en-US" sz="1000" b="1" spc="200" kern="0" dirty="0">
+            <a:pPr marL="0" indent="0" algn="ctr">
+              <a:buNone/>
+            </a:pPr>
+            <a:r>
+              <a:rPr lang="en-US" sz="1000" b="1" kern="0" spc="200" dirty="0">
                 <a:solidFill>
                   <a:srgbClr val="D4943A"/>
                 </a:solidFill>
@@ -5733,6 +5754,13 @@
             <a:prstDash val="solid"/>
           </a:ln>
         </p:spPr>
+        <p:txBody>
+          <a:bodyPr/>
+          <a:lstStyle/>
+          <a:p>
+            <a:endParaRPr lang="en-US"/>
+          </a:p>
+        </p:txBody>
       </p:sp>
       <p:sp>
         <p:nvSpPr>
@@ -5755,7 +5783,7 @@
           <a:bodyPr wrap="square" rtlCol="0" anchor="ctr"/>
           <a:lstStyle/>
           <a:p>
-            <a:pPr algn="ctr" indent="0" marL="0">
+            <a:pPr marL="0" indent="0" algn="ctr">
               <a:buNone/>
             </a:pPr>
             <a:r>
@@ -5801,6 +5829,13 @@
             <a:prstDash val="solid"/>
           </a:ln>
         </p:spPr>
+        <p:txBody>
+          <a:bodyPr/>
+          <a:lstStyle/>
+          <a:p>
+            <a:endParaRPr lang="en-US"/>
+          </a:p>
+        </p:txBody>
       </p:sp>
       <p:sp>
         <p:nvSpPr>
@@ -5823,7 +5858,7 @@
           <a:bodyPr wrap="square" rtlCol="0" anchor="ctr"/>
           <a:lstStyle/>
           <a:p>
-            <a:pPr algn="ctr" indent="0" marL="0">
+            <a:pPr marL="0" indent="0" algn="ctr">
               <a:buNone/>
             </a:pPr>
             <a:r>
@@ -5862,7 +5897,7 @@
           <a:bodyPr wrap="square" rtlCol="0" anchor="ctr"/>
           <a:lstStyle/>
           <a:p>
-            <a:pPr algn="r" indent="0" marL="0">
+            <a:pPr marL="0" indent="0" algn="r">
               <a:buNone/>
             </a:pPr>
             <a:r>
@@ -5901,7 +5936,7 @@
           <a:bodyPr wrap="square" rtlCol="0" anchor="ctr"/>
           <a:lstStyle/>
           <a:p>
-            <a:pPr algn="ctr" indent="0" marL="0">
+            <a:pPr marL="0" indent="0" algn="ctr">
               <a:buNone/>
             </a:pPr>
             <a:r>
@@ -5968,6 +6003,13 @@
             <a:prstDash val="solid"/>
           </a:ln>
         </p:spPr>
+        <p:txBody>
+          <a:bodyPr/>
+          <a:lstStyle/>
+          <a:p>
+            <a:endParaRPr lang="en-US"/>
+          </a:p>
+        </p:txBody>
       </p:sp>
       <p:sp>
         <p:nvSpPr>
@@ -5990,11 +6032,11 @@
           <a:bodyPr wrap="square" rtlCol="0" anchor="ctr"/>
           <a:lstStyle/>
           <a:p>
-            <a:pPr indent="0" marL="0">
-              <a:buNone/>
-            </a:pPr>
-            <a:r>
-              <a:rPr lang="en-US" sz="1000" b="1" spc="150" kern="0" dirty="0">
+            <a:pPr marL="0" indent="0">
+              <a:buNone/>
+            </a:pPr>
+            <a:r>
+              <a:rPr lang="en-US" sz="1000" b="1" kern="0" spc="150" dirty="0">
                 <a:solidFill>
                   <a:srgbClr val="D4943A"/>
                 </a:solidFill>
@@ -6032,6 +6074,13 @@
             <a:prstDash val="solid"/>
           </a:ln>
         </p:spPr>
+        <p:txBody>
+          <a:bodyPr/>
+          <a:lstStyle/>
+          <a:p>
+            <a:endParaRPr lang="en-US"/>
+          </a:p>
+        </p:txBody>
       </p:sp>
       <p:sp>
         <p:nvSpPr>
@@ -6054,7 +6103,7 @@
           <a:bodyPr wrap="square" rtlCol="0" anchor="ctr"/>
           <a:lstStyle/>
           <a:p>
-            <a:pPr indent="0" marL="0">
+            <a:pPr marL="0" indent="0">
               <a:buNone/>
             </a:pPr>
             <a:r>
@@ -6093,7 +6142,7 @@
           <a:bodyPr wrap="square" rtlCol="0" anchor="ctr"/>
           <a:lstStyle/>
           <a:p>
-            <a:pPr indent="0" marL="0">
+            <a:pPr marL="0" indent="0">
               <a:buNone/>
             </a:pPr>
             <a:r>
@@ -6137,6 +6186,13 @@
             <a:prstDash val="solid"/>
           </a:ln>
         </p:spPr>
+        <p:txBody>
+          <a:bodyPr/>
+          <a:lstStyle/>
+          <a:p>
+            <a:endParaRPr lang="en-US"/>
+          </a:p>
+        </p:txBody>
       </p:sp>
       <p:sp>
         <p:nvSpPr>
@@ -6159,11 +6215,11 @@
           <a:bodyPr wrap="square" rtlCol="0" anchor="ctr"/>
           <a:lstStyle/>
           <a:p>
-            <a:pPr indent="0" marL="0">
-              <a:buNone/>
-            </a:pPr>
-            <a:r>
-              <a:rPr lang="en-US" sz="1000" b="1" spc="100" kern="0" dirty="0">
+            <a:pPr marL="0" indent="0">
+              <a:buNone/>
+            </a:pPr>
+            <a:r>
+              <a:rPr lang="en-US" sz="1000" b="1" kern="0" spc="100" dirty="0">
                 <a:solidFill>
                   <a:srgbClr val="55C8E8"/>
                 </a:solidFill>
@@ -6198,7 +6254,7 @@
           <a:bodyPr wrap="square" rtlCol="0" anchor="t"/>
           <a:lstStyle/>
           <a:p>
-            <a:pPr indent="0" marL="0">
+            <a:pPr marL="0" indent="0">
               <a:buNone/>
             </a:pPr>
             <a:r>
@@ -6242,6 +6298,13 @@
             <a:prstDash val="solid"/>
           </a:ln>
         </p:spPr>
+        <p:txBody>
+          <a:bodyPr/>
+          <a:lstStyle/>
+          <a:p>
+            <a:endParaRPr lang="en-US"/>
+          </a:p>
+        </p:txBody>
       </p:sp>
       <p:sp>
         <p:nvSpPr>
@@ -6264,7 +6327,7 @@
           <a:bodyPr wrap="square" rtlCol="0" anchor="ctr"/>
           <a:lstStyle/>
           <a:p>
-            <a:pPr indent="0" marL="0">
+            <a:pPr marL="0" indent="0">
               <a:buNone/>
             </a:pPr>
             <a:r>
@@ -6308,6 +6371,13 @@
             <a:prstDash val="solid"/>
           </a:ln>
         </p:spPr>
+        <p:txBody>
+          <a:bodyPr/>
+          <a:lstStyle/>
+          <a:p>
+            <a:endParaRPr lang="en-US"/>
+          </a:p>
+        </p:txBody>
       </p:sp>
       <p:sp>
         <p:nvSpPr>
@@ -6330,11 +6400,11 @@
           <a:bodyPr wrap="square" rtlCol="0" anchor="ctr"/>
           <a:lstStyle/>
           <a:p>
-            <a:pPr indent="0" marL="0">
-              <a:buNone/>
-            </a:pPr>
-            <a:r>
-              <a:rPr lang="en-US" sz="1000" b="1" spc="100" kern="0" dirty="0">
+            <a:pPr marL="0" indent="0">
+              <a:buNone/>
+            </a:pPr>
+            <a:r>
+              <a:rPr lang="en-US" sz="1000" b="1" kern="0" spc="100" dirty="0">
                 <a:solidFill>
                   <a:srgbClr val="D4943A"/>
                 </a:solidFill>
@@ -6369,7 +6439,7 @@
           <a:bodyPr wrap="square" rtlCol="0" anchor="t"/>
           <a:lstStyle/>
           <a:p>
-            <a:pPr indent="0" marL="0">
+            <a:pPr marL="0" indent="0">
               <a:buNone/>
             </a:pPr>
             <a:r>
@@ -6413,6 +6483,13 @@
             <a:prstDash val="solid"/>
           </a:ln>
         </p:spPr>
+        <p:txBody>
+          <a:bodyPr/>
+          <a:lstStyle/>
+          <a:p>
+            <a:endParaRPr lang="en-US"/>
+          </a:p>
+        </p:txBody>
       </p:sp>
       <p:sp>
         <p:nvSpPr>
@@ -6435,7 +6512,7 @@
           <a:bodyPr wrap="square" rtlCol="0" anchor="ctr"/>
           <a:lstStyle/>
           <a:p>
-            <a:pPr indent="0" marL="0">
+            <a:pPr marL="0" indent="0">
               <a:buNone/>
             </a:pPr>
             <a:r>
@@ -6479,6 +6556,13 @@
             <a:prstDash val="solid"/>
           </a:ln>
         </p:spPr>
+        <p:txBody>
+          <a:bodyPr/>
+          <a:lstStyle/>
+          <a:p>
+            <a:endParaRPr lang="en-US"/>
+          </a:p>
+        </p:txBody>
       </p:sp>
       <p:sp>
         <p:nvSpPr>
@@ -6501,11 +6585,11 @@
           <a:bodyPr wrap="square" rtlCol="0" anchor="ctr"/>
           <a:lstStyle/>
           <a:p>
-            <a:pPr indent="0" marL="0">
-              <a:buNone/>
-            </a:pPr>
-            <a:r>
-              <a:rPr lang="en-US" sz="1000" b="1" spc="100" kern="0" dirty="0">
+            <a:pPr marL="0" indent="0">
+              <a:buNone/>
+            </a:pPr>
+            <a:r>
+              <a:rPr lang="en-US" sz="1000" b="1" kern="0" spc="100" dirty="0">
                 <a:solidFill>
                   <a:srgbClr val="34B76F"/>
                 </a:solidFill>
@@ -6540,7 +6624,7 @@
           <a:bodyPr wrap="square" rtlCol="0" anchor="t"/>
           <a:lstStyle/>
           <a:p>
-            <a:pPr indent="0" marL="0">
+            <a:pPr marL="0" indent="0">
               <a:buNone/>
             </a:pPr>
             <a:r>
@@ -6584,6 +6668,13 @@
             <a:prstDash val="solid"/>
           </a:ln>
         </p:spPr>
+        <p:txBody>
+          <a:bodyPr/>
+          <a:lstStyle/>
+          <a:p>
+            <a:endParaRPr lang="en-US"/>
+          </a:p>
+        </p:txBody>
       </p:sp>
       <p:sp>
         <p:nvSpPr>
@@ -6606,7 +6697,7 @@
           <a:bodyPr wrap="square" rtlCol="0" anchor="ctr"/>
           <a:lstStyle/>
           <a:p>
-            <a:pPr indent="0" marL="0">
+            <a:pPr marL="0" indent="0">
               <a:buNone/>
             </a:pPr>
             <a:r>
@@ -6673,6 +6764,13 @@
             <a:prstDash val="solid"/>
           </a:ln>
         </p:spPr>
+        <p:txBody>
+          <a:bodyPr/>
+          <a:lstStyle/>
+          <a:p>
+            <a:endParaRPr lang="en-US"/>
+          </a:p>
+        </p:txBody>
       </p:sp>
       <p:sp>
         <p:nvSpPr>
@@ -6695,11 +6793,11 @@
           <a:bodyPr wrap="square" rtlCol="0" anchor="ctr"/>
           <a:lstStyle/>
           <a:p>
-            <a:pPr indent="0" marL="0">
-              <a:buNone/>
-            </a:pPr>
-            <a:r>
-              <a:rPr lang="en-US" sz="1000" b="1" spc="150" kern="0" dirty="0">
+            <a:pPr marL="0" indent="0">
+              <a:buNone/>
+            </a:pPr>
+            <a:r>
+              <a:rPr lang="en-US" sz="1000" b="1" kern="0" spc="150" dirty="0">
                 <a:solidFill>
                   <a:srgbClr val="0E1C42"/>
                 </a:solidFill>
@@ -6737,6 +6835,13 @@
             <a:prstDash val="solid"/>
           </a:ln>
         </p:spPr>
+        <p:txBody>
+          <a:bodyPr/>
+          <a:lstStyle/>
+          <a:p>
+            <a:endParaRPr lang="en-US"/>
+          </a:p>
+        </p:txBody>
       </p:sp>
       <p:sp>
         <p:nvSpPr>
@@ -6759,7 +6864,7 @@
           <a:bodyPr wrap="square" rtlCol="0" anchor="ctr"/>
           <a:lstStyle/>
           <a:p>
-            <a:pPr indent="0" marL="0">
+            <a:pPr marL="0" indent="0">
               <a:buNone/>
             </a:pPr>
             <a:r>
@@ -6803,6 +6908,13 @@
             <a:prstDash val="solid"/>
           </a:ln>
         </p:spPr>
+        <p:txBody>
+          <a:bodyPr/>
+          <a:lstStyle/>
+          <a:p>
+            <a:endParaRPr lang="en-US"/>
+          </a:p>
+        </p:txBody>
       </p:sp>
       <p:sp>
         <p:nvSpPr>
@@ -6825,11 +6937,11 @@
           <a:bodyPr wrap="square" lIns="0" tIns="0" rIns="0" bIns="0" rtlCol="0" anchor="ctr"/>
           <a:lstStyle/>
           <a:p>
-            <a:pPr indent="0" marL="0">
-              <a:buNone/>
-            </a:pPr>
-            <a:r>
-              <a:rPr lang="en-US" sz="900" b="1" spc="150" kern="0" dirty="0">
+            <a:pPr marL="0" indent="0">
+              <a:buNone/>
+            </a:pPr>
+            <a:r>
+              <a:rPr lang="en-US" sz="900" b="1" kern="0" spc="150" dirty="0">
                 <a:solidFill>
                   <a:srgbClr val="55C8E8"/>
                 </a:solidFill>
@@ -6864,7 +6976,7 @@
           <a:bodyPr wrap="square" lIns="0" tIns="0" rIns="0" bIns="0" rtlCol="0" anchor="t"/>
           <a:lstStyle/>
           <a:p>
-            <a:pPr indent="0" marL="0">
+            <a:pPr marL="0" indent="0">
               <a:spcAft>
                 <a:spcPts val="400"/>
               </a:spcAft>
@@ -6884,7 +6996,7 @@
             <a:endParaRPr lang="en-US" sz="1100" dirty="0"/>
           </a:p>
           <a:p>
-            <a:pPr indent="0" marL="0">
+            <a:pPr marL="0" indent="0">
               <a:spcAft>
                 <a:spcPts val="400"/>
               </a:spcAft>
@@ -6904,7 +7016,7 @@
             <a:endParaRPr lang="en-US" sz="1100" dirty="0"/>
           </a:p>
           <a:p>
-            <a:pPr indent="0" marL="0">
+            <a:pPr marL="0" indent="0">
               <a:spcAft>
                 <a:spcPts val="400"/>
               </a:spcAft>
@@ -6924,7 +7036,7 @@
             <a:endParaRPr lang="en-US" sz="1100" dirty="0"/>
           </a:p>
           <a:p>
-            <a:pPr indent="0" marL="0">
+            <a:pPr marL="0" indent="0">
               <a:spcAft>
                 <a:spcPts val="400"/>
               </a:spcAft>
@@ -6971,6 +7083,13 @@
             <a:prstDash val="solid"/>
           </a:ln>
         </p:spPr>
+        <p:txBody>
+          <a:bodyPr/>
+          <a:lstStyle/>
+          <a:p>
+            <a:endParaRPr lang="en-US"/>
+          </a:p>
+        </p:txBody>
       </p:sp>
       <p:sp>
         <p:nvSpPr>
@@ -6993,11 +7112,11 @@
           <a:bodyPr wrap="square" lIns="0" tIns="0" rIns="0" bIns="0" rtlCol="0" anchor="ctr"/>
           <a:lstStyle/>
           <a:p>
-            <a:pPr indent="0" marL="0">
-              <a:buNone/>
-            </a:pPr>
-            <a:r>
-              <a:rPr lang="en-US" sz="900" b="1" spc="150" kern="0" dirty="0">
+            <a:pPr marL="0" indent="0">
+              <a:buNone/>
+            </a:pPr>
+            <a:r>
+              <a:rPr lang="en-US" sz="900" b="1" kern="0" spc="150" dirty="0">
                 <a:solidFill>
                   <a:srgbClr val="D4943A"/>
                 </a:solidFill>
@@ -7032,7 +7151,7 @@
           <a:bodyPr wrap="square" lIns="0" tIns="0" rIns="0" bIns="0" rtlCol="0" anchor="t"/>
           <a:lstStyle/>
           <a:p>
-            <a:pPr indent="0" marL="0">
+            <a:pPr marL="0" indent="0">
               <a:spcAft>
                 <a:spcPts val="500"/>
               </a:spcAft>
@@ -7052,7 +7171,7 @@
             <a:endParaRPr lang="en-US" sz="1200" dirty="0"/>
           </a:p>
           <a:p>
-            <a:pPr indent="0" marL="0">
+            <a:pPr marL="0" indent="0">
               <a:spcAft>
                 <a:spcPts val="500"/>
               </a:spcAft>
@@ -7072,7 +7191,7 @@
             <a:endParaRPr lang="en-US" sz="1200" dirty="0"/>
           </a:p>
           <a:p>
-            <a:pPr indent="0" marL="0">
+            <a:pPr marL="0" indent="0">
               <a:spcAft>
                 <a:spcPts val="500"/>
               </a:spcAft>
@@ -7119,6 +7238,13 @@
             <a:prstDash val="solid"/>
           </a:ln>
         </p:spPr>
+        <p:txBody>
+          <a:bodyPr/>
+          <a:lstStyle/>
+          <a:p>
+            <a:endParaRPr lang="en-US"/>
+          </a:p>
+        </p:txBody>
       </p:sp>
       <p:sp>
         <p:nvSpPr>
@@ -7141,11 +7267,11 @@
           <a:bodyPr wrap="square" rtlCol="0" anchor="ctr"/>
           <a:lstStyle/>
           <a:p>
-            <a:pPr indent="0" marL="0">
-              <a:buNone/>
-            </a:pPr>
-            <a:r>
-              <a:rPr lang="en-US" sz="900" b="1" spc="150" kern="0" dirty="0">
+            <a:pPr marL="0" indent="0">
+              <a:buNone/>
+            </a:pPr>
+            <a:r>
+              <a:rPr lang="en-US" sz="900" b="1" kern="0" spc="150" dirty="0">
                 <a:solidFill>
                   <a:srgbClr val="1A8A7D"/>
                 </a:solidFill>
@@ -7185,6 +7311,13 @@
             <a:prstDash val="solid"/>
           </a:ln>
         </p:spPr>
+        <p:txBody>
+          <a:bodyPr/>
+          <a:lstStyle/>
+          <a:p>
+            <a:endParaRPr lang="en-US"/>
+          </a:p>
+        </p:txBody>
       </p:sp>
       <p:sp>
         <p:nvSpPr>
@@ -7207,7 +7340,7 @@
           <a:bodyPr wrap="square" rtlCol="0" anchor="ctr"/>
           <a:lstStyle/>
           <a:p>
-            <a:pPr indent="0" marL="0">
+            <a:pPr marL="0" indent="0">
               <a:buNone/>
             </a:pPr>
             <a:r>
@@ -7246,7 +7379,7 @@
           <a:bodyPr wrap="square" rtlCol="0" anchor="ctr"/>
           <a:lstStyle/>
           <a:p>
-            <a:pPr indent="0" marL="0">
+            <a:pPr marL="0" indent="0">
               <a:buNone/>
             </a:pPr>
             <a:r>
@@ -7290,6 +7423,13 @@
             <a:prstDash val="solid"/>
           </a:ln>
         </p:spPr>
+        <p:txBody>
+          <a:bodyPr/>
+          <a:lstStyle/>
+          <a:p>
+            <a:endParaRPr lang="en-US"/>
+          </a:p>
+        </p:txBody>
       </p:sp>
       <p:sp>
         <p:nvSpPr>
@@ -7312,7 +7452,7 @@
           <a:bodyPr wrap="square" rtlCol="0" anchor="ctr"/>
           <a:lstStyle/>
           <a:p>
-            <a:pPr indent="0" marL="0">
+            <a:pPr marL="0" indent="0">
               <a:buNone/>
             </a:pPr>
             <a:r>
@@ -7351,7 +7491,7 @@
           <a:bodyPr wrap="square" rtlCol="0" anchor="ctr"/>
           <a:lstStyle/>
           <a:p>
-            <a:pPr indent="0" marL="0">
+            <a:pPr marL="0" indent="0">
               <a:buNone/>
             </a:pPr>
             <a:r>
@@ -7395,6 +7535,13 @@
             <a:prstDash val="solid"/>
           </a:ln>
         </p:spPr>
+        <p:txBody>
+          <a:bodyPr/>
+          <a:lstStyle/>
+          <a:p>
+            <a:endParaRPr lang="en-US"/>
+          </a:p>
+        </p:txBody>
       </p:sp>
       <p:sp>
         <p:nvSpPr>
@@ -7417,7 +7564,7 @@
           <a:bodyPr wrap="square" rtlCol="0" anchor="ctr"/>
           <a:lstStyle/>
           <a:p>
-            <a:pPr indent="0" marL="0">
+            <a:pPr marL="0" indent="0">
               <a:buNone/>
             </a:pPr>
             <a:r>
@@ -7456,7 +7603,7 @@
           <a:bodyPr wrap="square" rtlCol="0" anchor="ctr"/>
           <a:lstStyle/>
           <a:p>
-            <a:pPr indent="0" marL="0">
+            <a:pPr marL="0" indent="0">
               <a:buNone/>
             </a:pPr>
             <a:r>
@@ -7523,6 +7670,13 @@
             <a:prstDash val="solid"/>
           </a:ln>
         </p:spPr>
+        <p:txBody>
+          <a:bodyPr/>
+          <a:lstStyle/>
+          <a:p>
+            <a:endParaRPr lang="en-US"/>
+          </a:p>
+        </p:txBody>
       </p:sp>
       <p:sp>
         <p:nvSpPr>
@@ -7545,11 +7699,11 @@
           <a:bodyPr wrap="square" rtlCol="0" anchor="ctr"/>
           <a:lstStyle/>
           <a:p>
-            <a:pPr indent="0" marL="0">
-              <a:buNone/>
-            </a:pPr>
-            <a:r>
-              <a:rPr lang="en-US" sz="1000" b="1" spc="150" kern="0" dirty="0">
+            <a:pPr marL="0" indent="0">
+              <a:buNone/>
+            </a:pPr>
+            <a:r>
+              <a:rPr lang="en-US" sz="1000" b="1" kern="0" spc="150" dirty="0">
                 <a:solidFill>
                   <a:srgbClr val="E8636B"/>
                 </a:solidFill>
@@ -7587,6 +7741,13 @@
             <a:prstDash val="solid"/>
           </a:ln>
         </p:spPr>
+        <p:txBody>
+          <a:bodyPr/>
+          <a:lstStyle/>
+          <a:p>
+            <a:endParaRPr lang="en-US"/>
+          </a:p>
+        </p:txBody>
       </p:sp>
       <p:sp>
         <p:nvSpPr>
@@ -7609,7 +7770,7 @@
           <a:bodyPr wrap="square" rtlCol="0" anchor="ctr"/>
           <a:lstStyle/>
           <a:p>
-            <a:pPr indent="0" marL="0">
+            <a:pPr marL="0" indent="0">
               <a:buNone/>
             </a:pPr>
             <a:r>
@@ -7653,6 +7814,13 @@
             <a:prstDash val="solid"/>
           </a:ln>
         </p:spPr>
+        <p:txBody>
+          <a:bodyPr/>
+          <a:lstStyle/>
+          <a:p>
+            <a:endParaRPr lang="en-US"/>
+          </a:p>
+        </p:txBody>
       </p:sp>
       <p:sp>
         <p:nvSpPr>
@@ -7675,11 +7843,11 @@
           <a:bodyPr wrap="square" rtlCol="0" anchor="ctr"/>
           <a:lstStyle/>
           <a:p>
-            <a:pPr indent="0" marL="0">
-              <a:buNone/>
-            </a:pPr>
-            <a:r>
-              <a:rPr lang="en-US" sz="900" b="1" spc="150" kern="0" dirty="0">
+            <a:pPr marL="0" indent="0">
+              <a:buNone/>
+            </a:pPr>
+            <a:r>
+              <a:rPr lang="en-US" sz="900" b="1" kern="0" spc="150" dirty="0">
                 <a:solidFill>
                   <a:srgbClr val="E8636B"/>
                 </a:solidFill>
@@ -7714,7 +7882,7 @@
           <a:bodyPr wrap="square" rtlCol="0" anchor="t"/>
           <a:lstStyle/>
           <a:p>
-            <a:pPr indent="0" marL="0">
+            <a:pPr marL="0" indent="0">
               <a:buNone/>
             </a:pPr>
             <a:r>
@@ -7758,6 +7926,13 @@
             <a:prstDash val="solid"/>
           </a:ln>
         </p:spPr>
+        <p:txBody>
+          <a:bodyPr/>
+          <a:lstStyle/>
+          <a:p>
+            <a:endParaRPr lang="en-US"/>
+          </a:p>
+        </p:txBody>
       </p:sp>
       <p:sp>
         <p:nvSpPr>
@@ -7780,11 +7955,11 @@
           <a:bodyPr wrap="square" lIns="0" tIns="0" rIns="0" bIns="0" rtlCol="0" anchor="ctr"/>
           <a:lstStyle/>
           <a:p>
-            <a:pPr indent="0" marL="0">
-              <a:buNone/>
-            </a:pPr>
-            <a:r>
-              <a:rPr lang="en-US" sz="900" b="1" spc="150" kern="0" dirty="0">
+            <a:pPr marL="0" indent="0">
+              <a:buNone/>
+            </a:pPr>
+            <a:r>
+              <a:rPr lang="en-US" sz="900" b="1" kern="0" spc="150" dirty="0">
                 <a:solidFill>
                   <a:srgbClr val="55C8E8"/>
                 </a:solidFill>
@@ -7819,7 +7994,7 @@
           <a:bodyPr wrap="square" lIns="0" tIns="0" rIns="0" bIns="0" rtlCol="0" anchor="t"/>
           <a:lstStyle/>
           <a:p>
-            <a:pPr indent="0" marL="0">
+            <a:pPr marL="0" indent="0">
               <a:spcAft>
                 <a:spcPts val="400"/>
               </a:spcAft>
@@ -7839,7 +8014,7 @@
             <a:endParaRPr lang="en-US" sz="1100" dirty="0"/>
           </a:p>
           <a:p>
-            <a:pPr indent="0" marL="0">
+            <a:pPr marL="0" indent="0">
               <a:spcAft>
                 <a:spcPts val="400"/>
               </a:spcAft>
@@ -7859,7 +8034,7 @@
             <a:endParaRPr lang="en-US" sz="1100" dirty="0"/>
           </a:p>
           <a:p>
-            <a:pPr indent="0" marL="0">
+            <a:pPr marL="0" indent="0">
               <a:spcAft>
                 <a:spcPts val="400"/>
               </a:spcAft>
@@ -7879,7 +8054,7 @@
             <a:endParaRPr lang="en-US" sz="1100" dirty="0"/>
           </a:p>
           <a:p>
-            <a:pPr indent="0" marL="0">
+            <a:pPr marL="0" indent="0">
               <a:spcAft>
                 <a:spcPts val="400"/>
               </a:spcAft>
@@ -7926,6 +8101,13 @@
             <a:prstDash val="solid"/>
           </a:ln>
         </p:spPr>
+        <p:txBody>
+          <a:bodyPr/>
+          <a:lstStyle/>
+          <a:p>
+            <a:endParaRPr lang="en-US"/>
+          </a:p>
+        </p:txBody>
       </p:sp>
       <p:sp>
         <p:nvSpPr>
@@ -7948,11 +8130,11 @@
           <a:bodyPr wrap="square" lIns="0" tIns="0" rIns="0" bIns="0" rtlCol="0" anchor="ctr"/>
           <a:lstStyle/>
           <a:p>
-            <a:pPr indent="0" marL="0">
-              <a:buNone/>
-            </a:pPr>
-            <a:r>
-              <a:rPr lang="en-US" sz="900" b="1" spc="150" kern="0" dirty="0">
+            <a:pPr marL="0" indent="0">
+              <a:buNone/>
+            </a:pPr>
+            <a:r>
+              <a:rPr lang="en-US" sz="900" b="1" kern="0" spc="150" dirty="0">
                 <a:solidFill>
                   <a:srgbClr val="D4943A"/>
                 </a:solidFill>
@@ -7987,7 +8169,7 @@
           <a:bodyPr wrap="square" lIns="0" tIns="0" rIns="0" bIns="0" rtlCol="0" anchor="t"/>
           <a:lstStyle/>
           <a:p>
-            <a:pPr indent="0" marL="0">
+            <a:pPr marL="0" indent="0">
               <a:spcAft>
                 <a:spcPts val="500"/>
               </a:spcAft>
@@ -8007,7 +8189,7 @@
             <a:endParaRPr lang="en-US" sz="1200" dirty="0"/>
           </a:p>
           <a:p>
-            <a:pPr indent="0" marL="0">
+            <a:pPr marL="0" indent="0">
               <a:spcAft>
                 <a:spcPts val="500"/>
               </a:spcAft>
@@ -8077,6 +8259,13 @@
             <a:prstDash val="solid"/>
           </a:ln>
         </p:spPr>
+        <p:txBody>
+          <a:bodyPr/>
+          <a:lstStyle/>
+          <a:p>
+            <a:endParaRPr lang="en-US"/>
+          </a:p>
+        </p:txBody>
       </p:sp>
       <p:sp>
         <p:nvSpPr>
@@ -8099,11 +8288,11 @@
           <a:bodyPr wrap="square" rtlCol="0" anchor="ctr"/>
           <a:lstStyle/>
           <a:p>
-            <a:pPr indent="0" marL="0">
-              <a:buNone/>
-            </a:pPr>
-            <a:r>
-              <a:rPr lang="en-US" sz="1000" b="1" spc="150" kern="0" dirty="0">
+            <a:pPr marL="0" indent="0">
+              <a:buNone/>
+            </a:pPr>
+            <a:r>
+              <a:rPr lang="en-US" sz="1000" b="1" kern="0" spc="150" dirty="0">
                 <a:solidFill>
                   <a:srgbClr val="34B76F"/>
                 </a:solidFill>
@@ -8141,6 +8330,13 @@
             <a:prstDash val="solid"/>
           </a:ln>
         </p:spPr>
+        <p:txBody>
+          <a:bodyPr/>
+          <a:lstStyle/>
+          <a:p>
+            <a:endParaRPr lang="en-US"/>
+          </a:p>
+        </p:txBody>
       </p:sp>
       <p:sp>
         <p:nvSpPr>
@@ -8163,7 +8359,7 @@
           <a:bodyPr wrap="square" rtlCol="0" anchor="ctr"/>
           <a:lstStyle/>
           <a:p>
-            <a:pPr indent="0" marL="0">
+            <a:pPr marL="0" indent="0">
               <a:buNone/>
             </a:pPr>
             <a:r>
@@ -8207,6 +8403,13 @@
             <a:prstDash val="solid"/>
           </a:ln>
         </p:spPr>
+        <p:txBody>
+          <a:bodyPr/>
+          <a:lstStyle/>
+          <a:p>
+            <a:endParaRPr lang="en-US"/>
+          </a:p>
+        </p:txBody>
       </p:sp>
       <p:sp>
         <p:nvSpPr>
@@ -8229,7 +8432,7 @@
           <a:bodyPr wrap="square" rtlCol="0" anchor="ctr"/>
           <a:lstStyle/>
           <a:p>
-            <a:pPr indent="0" marL="0">
+            <a:pPr marL="0" indent="0">
               <a:buNone/>
             </a:pPr>
             <a:r>
@@ -8273,6 +8476,13 @@
             <a:prstDash val="solid"/>
           </a:ln>
         </p:spPr>
+        <p:txBody>
+          <a:bodyPr/>
+          <a:lstStyle/>
+          <a:p>
+            <a:endParaRPr lang="en-US"/>
+          </a:p>
+        </p:txBody>
       </p:sp>
       <p:sp>
         <p:nvSpPr>
@@ -8295,11 +8505,11 @@
           <a:bodyPr wrap="square" lIns="0" tIns="0" rIns="0" bIns="0" rtlCol="0" anchor="ctr"/>
           <a:lstStyle/>
           <a:p>
-            <a:pPr indent="0" marL="0">
-              <a:buNone/>
-            </a:pPr>
-            <a:r>
-              <a:rPr lang="en-US" sz="900" b="1" spc="150" kern="0" dirty="0">
+            <a:pPr marL="0" indent="0">
+              <a:buNone/>
+            </a:pPr>
+            <a:r>
+              <a:rPr lang="en-US" sz="900" b="1" kern="0" spc="150" dirty="0">
                 <a:solidFill>
                   <a:srgbClr val="D4943A"/>
                 </a:solidFill>
@@ -8334,7 +8544,7 @@
           <a:bodyPr wrap="square" lIns="0" tIns="0" rIns="0" bIns="0" rtlCol="0" anchor="t"/>
           <a:lstStyle/>
           <a:p>
-            <a:pPr indent="0" marL="0">
+            <a:pPr marL="0" indent="0">
               <a:spcAft>
                 <a:spcPts val="500"/>
               </a:spcAft>
@@ -8354,7 +8564,7 @@
             <a:endParaRPr lang="en-US" sz="1200" dirty="0"/>
           </a:p>
           <a:p>
-            <a:pPr indent="0" marL="0">
+            <a:pPr marL="0" indent="0">
               <a:spcAft>
                 <a:spcPts val="500"/>
               </a:spcAft>
@@ -8374,7 +8584,7 @@
             <a:endParaRPr lang="en-US" sz="1200" dirty="0"/>
           </a:p>
           <a:p>
-            <a:pPr indent="0" marL="0">
+            <a:pPr marL="0" indent="0">
               <a:spcAft>
                 <a:spcPts val="500"/>
               </a:spcAft>
@@ -8421,6 +8631,13 @@
             <a:prstDash val="solid"/>
           </a:ln>
         </p:spPr>
+        <p:txBody>
+          <a:bodyPr/>
+          <a:lstStyle/>
+          <a:p>
+            <a:endParaRPr lang="en-US"/>
+          </a:p>
+        </p:txBody>
       </p:sp>
       <p:sp>
         <p:nvSpPr>
@@ -8443,11 +8660,11 @@
           <a:bodyPr wrap="square" lIns="0" tIns="0" rIns="0" bIns="0" rtlCol="0" anchor="ctr"/>
           <a:lstStyle/>
           <a:p>
-            <a:pPr indent="0" marL="0">
-              <a:buNone/>
-            </a:pPr>
-            <a:r>
-              <a:rPr lang="en-US" sz="900" b="1" spc="150" kern="0" dirty="0">
+            <a:pPr marL="0" indent="0">
+              <a:buNone/>
+            </a:pPr>
+            <a:r>
+              <a:rPr lang="en-US" sz="900" b="1" kern="0" spc="150" dirty="0">
                 <a:solidFill>
                   <a:srgbClr val="55C8E8"/>
                 </a:solidFill>
@@ -8482,7 +8699,7 @@
           <a:bodyPr wrap="square" lIns="0" tIns="0" rIns="0" bIns="0" rtlCol="0" anchor="t"/>
           <a:lstStyle/>
           <a:p>
-            <a:pPr indent="0" marL="0">
+            <a:pPr marL="0" indent="0">
               <a:spcAft>
                 <a:spcPts val="400"/>
               </a:spcAft>
@@ -8502,7 +8719,7 @@
             <a:endParaRPr lang="en-US" sz="1100" dirty="0"/>
           </a:p>
           <a:p>
-            <a:pPr indent="0" marL="0">
+            <a:pPr marL="0" indent="0">
               <a:spcAft>
                 <a:spcPts val="400"/>
               </a:spcAft>
@@ -8522,7 +8739,7 @@
             <a:endParaRPr lang="en-US" sz="1100" dirty="0"/>
           </a:p>
           <a:p>
-            <a:pPr indent="0" marL="0">
+            <a:pPr marL="0" indent="0">
               <a:spcAft>
                 <a:spcPts val="400"/>
               </a:spcAft>
@@ -8542,7 +8759,7 @@
             <a:endParaRPr lang="en-US" sz="1100" dirty="0"/>
           </a:p>
           <a:p>
-            <a:pPr indent="0" marL="0">
+            <a:pPr marL="0" indent="0">
               <a:spcAft>
                 <a:spcPts val="400"/>
               </a:spcAft>
@@ -8589,6 +8806,13 @@
             <a:prstDash val="solid"/>
           </a:ln>
         </p:spPr>
+        <p:txBody>
+          <a:bodyPr/>
+          <a:lstStyle/>
+          <a:p>
+            <a:endParaRPr lang="en-US"/>
+          </a:p>
+        </p:txBody>
       </p:sp>
       <p:sp>
         <p:nvSpPr>
@@ -8611,11 +8835,11 @@
           <a:bodyPr wrap="square" rtlCol="0" anchor="ctr"/>
           <a:lstStyle/>
           <a:p>
-            <a:pPr algn="ctr" indent="0" marL="0">
-              <a:buNone/>
-            </a:pPr>
-            <a:r>
-              <a:rPr lang="en-US" sz="1400" b="1" spc="200" kern="0" dirty="0">
+            <a:pPr marL="0" indent="0" algn="ctr">
+              <a:buNone/>
+            </a:pPr>
+            <a:r>
+              <a:rPr lang="en-US" sz="1400" b="1" kern="0" spc="200" dirty="0">
                 <a:solidFill>
                   <a:srgbClr val="34B76F"/>
                 </a:solidFill>
@@ -8650,7 +8874,7 @@
           <a:bodyPr wrap="square" rtlCol="0" anchor="ctr"/>
           <a:lstStyle/>
           <a:p>
-            <a:pPr algn="ctr" indent="0" marL="0">
+            <a:pPr marL="0" indent="0" algn="ctr">
               <a:buNone/>
             </a:pPr>
             <a:r>
@@ -8667,7 +8891,7 @@
             <a:endParaRPr lang="en-US" sz="1100" dirty="0"/>
           </a:p>
           <a:p>
-            <a:pPr algn="ctr" indent="0" marL="0">
+            <a:pPr marL="0" indent="0" algn="ctr">
               <a:buNone/>
             </a:pPr>
             <a:r>
@@ -8734,6 +8958,13 @@
             <a:prstDash val="solid"/>
           </a:ln>
         </p:spPr>
+        <p:txBody>
+          <a:bodyPr/>
+          <a:lstStyle/>
+          <a:p>
+            <a:endParaRPr lang="en-US"/>
+          </a:p>
+        </p:txBody>
       </p:sp>
       <p:sp>
         <p:nvSpPr>
@@ -8756,11 +8987,11 @@
           <a:bodyPr wrap="square" rtlCol="0" anchor="ctr"/>
           <a:lstStyle/>
           <a:p>
-            <a:pPr indent="0" marL="0">
-              <a:buNone/>
-            </a:pPr>
-            <a:r>
-              <a:rPr lang="en-US" sz="1000" b="1" spc="150" kern="0" dirty="0">
+            <a:pPr marL="0" indent="0">
+              <a:buNone/>
+            </a:pPr>
+            <a:r>
+              <a:rPr lang="en-US" sz="1000" b="1" kern="0" spc="150" dirty="0">
                 <a:solidFill>
                   <a:srgbClr val="8B6FC0"/>
                 </a:solidFill>
@@ -8798,6 +9029,13 @@
             <a:prstDash val="solid"/>
           </a:ln>
         </p:spPr>
+        <p:txBody>
+          <a:bodyPr/>
+          <a:lstStyle/>
+          <a:p>
+            <a:endParaRPr lang="en-US"/>
+          </a:p>
+        </p:txBody>
       </p:sp>
       <p:sp>
         <p:nvSpPr>
@@ -8825,6 +9063,13 @@
             <a:prstDash val="solid"/>
           </a:ln>
         </p:spPr>
+        <p:txBody>
+          <a:bodyPr/>
+          <a:lstStyle/>
+          <a:p>
+            <a:endParaRPr lang="en-US"/>
+          </a:p>
+        </p:txBody>
       </p:sp>
       <p:sp>
         <p:nvSpPr>
@@ -8847,11 +9092,11 @@
           <a:bodyPr wrap="square" rtlCol="0" anchor="ctr"/>
           <a:lstStyle/>
           <a:p>
-            <a:pPr indent="0" marL="0">
-              <a:buNone/>
-            </a:pPr>
-            <a:r>
-              <a:rPr lang="en-US" sz="900" b="1" spc="150" kern="0" dirty="0">
+            <a:pPr marL="0" indent="0">
+              <a:buNone/>
+            </a:pPr>
+            <a:r>
+              <a:rPr lang="en-US" sz="900" b="1" kern="0" spc="150" dirty="0">
                 <a:solidFill>
                   <a:srgbClr val="8B6FC0"/>
                 </a:solidFill>
@@ -8886,7 +9131,7 @@
           <a:bodyPr wrap="square" rtlCol="0" anchor="t"/>
           <a:lstStyle/>
           <a:p>
-            <a:pPr indent="0" marL="0">
+            <a:pPr marL="0" indent="0">
               <a:buNone/>
             </a:pPr>
             <a:r>
@@ -8930,6 +9175,13 @@
             <a:prstDash val="solid"/>
           </a:ln>
         </p:spPr>
+        <p:txBody>
+          <a:bodyPr/>
+          <a:lstStyle/>
+          <a:p>
+            <a:endParaRPr lang="en-US"/>
+          </a:p>
+        </p:txBody>
       </p:sp>
       <p:sp>
         <p:nvSpPr>
@@ -8952,11 +9204,11 @@
           <a:bodyPr wrap="square" rtlCol="0" anchor="ctr"/>
           <a:lstStyle/>
           <a:p>
-            <a:pPr indent="0" marL="0">
-              <a:buNone/>
-            </a:pPr>
-            <a:r>
-              <a:rPr lang="en-US" sz="1000" b="1" spc="100" kern="0" dirty="0">
+            <a:pPr marL="0" indent="0">
+              <a:buNone/>
+            </a:pPr>
+            <a:r>
+              <a:rPr lang="en-US" sz="1000" b="1" kern="0" spc="100" dirty="0">
                 <a:solidFill>
                   <a:srgbClr val="55C8E8"/>
                 </a:solidFill>
@@ -8991,7 +9243,7 @@
           <a:bodyPr wrap="square" rtlCol="0" anchor="t"/>
           <a:lstStyle/>
           <a:p>
-            <a:pPr indent="0" marL="0">
+            <a:pPr marL="0" indent="0">
               <a:buNone/>
             </a:pPr>
             <a:r>
@@ -9035,6 +9287,13 @@
             <a:prstDash val="solid"/>
           </a:ln>
         </p:spPr>
+        <p:txBody>
+          <a:bodyPr/>
+          <a:lstStyle/>
+          <a:p>
+            <a:endParaRPr lang="en-US"/>
+          </a:p>
+        </p:txBody>
       </p:sp>
       <p:sp>
         <p:nvSpPr>
@@ -9057,11 +9316,11 @@
           <a:bodyPr wrap="square" rtlCol="0" anchor="ctr"/>
           <a:lstStyle/>
           <a:p>
-            <a:pPr indent="0" marL="0">
-              <a:buNone/>
-            </a:pPr>
-            <a:r>
-              <a:rPr lang="en-US" sz="1000" b="1" spc="100" kern="0" dirty="0">
+            <a:pPr marL="0" indent="0">
+              <a:buNone/>
+            </a:pPr>
+            <a:r>
+              <a:rPr lang="en-US" sz="1000" b="1" kern="0" spc="100" dirty="0">
                 <a:solidFill>
                   <a:srgbClr val="D4943A"/>
                 </a:solidFill>
@@ -9096,7 +9355,7 @@
           <a:bodyPr wrap="square" rtlCol="0" anchor="t"/>
           <a:lstStyle/>
           <a:p>
-            <a:pPr indent="0" marL="0">
+            <a:pPr marL="0" indent="0">
               <a:buNone/>
             </a:pPr>
             <a:r>
@@ -9140,6 +9399,13 @@
             <a:prstDash val="solid"/>
           </a:ln>
         </p:spPr>
+        <p:txBody>
+          <a:bodyPr/>
+          <a:lstStyle/>
+          <a:p>
+            <a:endParaRPr lang="en-US"/>
+          </a:p>
+        </p:txBody>
       </p:sp>
       <p:sp>
         <p:nvSpPr>
@@ -9162,11 +9428,11 @@
           <a:bodyPr wrap="square" lIns="0" tIns="0" rIns="0" bIns="0" rtlCol="0" anchor="ctr"/>
           <a:lstStyle/>
           <a:p>
-            <a:pPr indent="0" marL="0">
-              <a:buNone/>
-            </a:pPr>
-            <a:r>
-              <a:rPr lang="en-US" sz="900" b="1" spc="150" kern="0" dirty="0">
+            <a:pPr marL="0" indent="0">
+              <a:buNone/>
+            </a:pPr>
+            <a:r>
+              <a:rPr lang="en-US" sz="900" b="1" kern="0" spc="150" dirty="0">
                 <a:solidFill>
                   <a:srgbClr val="55C8E8"/>
                 </a:solidFill>
@@ -9201,7 +9467,7 @@
           <a:bodyPr wrap="square" lIns="0" tIns="0" rIns="0" bIns="0" rtlCol="0" anchor="t"/>
           <a:lstStyle/>
           <a:p>
-            <a:pPr indent="0" marL="0">
+            <a:pPr marL="0" indent="0">
               <a:spcAft>
                 <a:spcPts val="400"/>
               </a:spcAft>
@@ -9221,7 +9487,7 @@
             <a:endParaRPr lang="en-US" sz="1100" dirty="0"/>
           </a:p>
           <a:p>
-            <a:pPr indent="0" marL="0">
+            <a:pPr marL="0" indent="0">
               <a:spcAft>
                 <a:spcPts val="400"/>
               </a:spcAft>
@@ -9241,7 +9507,7 @@
             <a:endParaRPr lang="en-US" sz="1100" dirty="0"/>
           </a:p>
           <a:p>
-            <a:pPr indent="0" marL="0">
+            <a:pPr marL="0" indent="0">
               <a:spcAft>
                 <a:spcPts val="400"/>
               </a:spcAft>
@@ -9288,6 +9554,13 @@
             <a:prstDash val="solid"/>
           </a:ln>
         </p:spPr>
+        <p:txBody>
+          <a:bodyPr/>
+          <a:lstStyle/>
+          <a:p>
+            <a:endParaRPr lang="en-US"/>
+          </a:p>
+        </p:txBody>
       </p:sp>
       <p:sp>
         <p:nvSpPr>
@@ -9310,11 +9583,11 @@
           <a:bodyPr wrap="square" lIns="0" tIns="0" rIns="0" bIns="0" rtlCol="0" anchor="ctr"/>
           <a:lstStyle/>
           <a:p>
-            <a:pPr indent="0" marL="0">
-              <a:buNone/>
-            </a:pPr>
-            <a:r>
-              <a:rPr lang="en-US" sz="900" b="1" spc="150" kern="0" dirty="0">
+            <a:pPr marL="0" indent="0">
+              <a:buNone/>
+            </a:pPr>
+            <a:r>
+              <a:rPr lang="en-US" sz="900" b="1" kern="0" spc="150" dirty="0">
                 <a:solidFill>
                   <a:srgbClr val="D4943A"/>
                 </a:solidFill>
@@ -9349,7 +9622,7 @@
           <a:bodyPr wrap="square" lIns="0" tIns="0" rIns="0" bIns="0" rtlCol="0" anchor="t"/>
           <a:lstStyle/>
           <a:p>
-            <a:pPr indent="0" marL="0">
+            <a:pPr marL="0" indent="0">
               <a:spcAft>
                 <a:spcPts val="500"/>
               </a:spcAft>
@@ -9419,6 +9692,13 @@
             <a:prstDash val="solid"/>
           </a:ln>
         </p:spPr>
+        <p:txBody>
+          <a:bodyPr/>
+          <a:lstStyle/>
+          <a:p>
+            <a:endParaRPr lang="en-US"/>
+          </a:p>
+        </p:txBody>
       </p:sp>
       <p:sp>
         <p:nvSpPr>
@@ -9441,11 +9721,11 @@
           <a:bodyPr wrap="square" rtlCol="0" anchor="ctr"/>
           <a:lstStyle/>
           <a:p>
-            <a:pPr indent="0" marL="0">
-              <a:buNone/>
-            </a:pPr>
-            <a:r>
-              <a:rPr lang="en-US" sz="1000" b="1" spc="150" kern="0" dirty="0">
+            <a:pPr marL="0" indent="0">
+              <a:buNone/>
+            </a:pPr>
+            <a:r>
+              <a:rPr lang="en-US" sz="1000" b="1" kern="0" spc="150" dirty="0">
                 <a:solidFill>
                   <a:srgbClr val="E8636B"/>
                 </a:solidFill>
@@ -9483,6 +9763,13 @@
             <a:prstDash val="solid"/>
           </a:ln>
         </p:spPr>
+        <p:txBody>
+          <a:bodyPr/>
+          <a:lstStyle/>
+          <a:p>
+            <a:endParaRPr lang="en-US"/>
+          </a:p>
+        </p:txBody>
       </p:sp>
       <p:sp>
         <p:nvSpPr>
@@ -9510,6 +9797,13 @@
             <a:prstDash val="solid"/>
           </a:ln>
         </p:spPr>
+        <p:txBody>
+          <a:bodyPr/>
+          <a:lstStyle/>
+          <a:p>
+            <a:endParaRPr lang="en-US"/>
+          </a:p>
+        </p:txBody>
       </p:sp>
       <p:sp>
         <p:nvSpPr>
@@ -9532,11 +9826,11 @@
           <a:bodyPr wrap="square" rtlCol="0" anchor="ctr"/>
           <a:lstStyle/>
           <a:p>
-            <a:pPr indent="0" marL="0">
-              <a:buNone/>
-            </a:pPr>
-            <a:r>
-              <a:rPr lang="en-US" sz="900" b="1" spc="150" kern="0" dirty="0">
+            <a:pPr marL="0" indent="0">
+              <a:buNone/>
+            </a:pPr>
+            <a:r>
+              <a:rPr lang="en-US" sz="900" b="1" kern="0" spc="150" dirty="0">
                 <a:solidFill>
                   <a:srgbClr val="E8636B"/>
                 </a:solidFill>
@@ -9571,7 +9865,7 @@
           <a:bodyPr wrap="square" rtlCol="0" anchor="ctr"/>
           <a:lstStyle/>
           <a:p>
-            <a:pPr indent="0" marL="0">
+            <a:pPr marL="0" indent="0">
               <a:buNone/>
             </a:pPr>
             <a:r>
@@ -9610,7 +9904,7 @@
           <a:bodyPr wrap="square" rtlCol="0" anchor="ctr"/>
           <a:lstStyle/>
           <a:p>
-            <a:pPr indent="0" marL="0">
+            <a:pPr marL="0" indent="0">
               <a:buNone/>
             </a:pPr>
             <a:r>
@@ -9652,6 +9946,13 @@
             <a:prstDash val="solid"/>
           </a:ln>
         </p:spPr>
+        <p:txBody>
+          <a:bodyPr/>
+          <a:lstStyle/>
+          <a:p>
+            <a:endParaRPr lang="en-US"/>
+          </a:p>
+        </p:txBody>
       </p:sp>
       <p:sp>
         <p:nvSpPr>
@@ -9674,11 +9975,11 @@
           <a:bodyPr wrap="square" rtlCol="0" anchor="ctr"/>
           <a:lstStyle/>
           <a:p>
-            <a:pPr algn="ctr" indent="0" marL="0">
-              <a:buNone/>
-            </a:pPr>
-            <a:r>
-              <a:rPr lang="en-US" sz="800" b="1" spc="100" kern="0" dirty="0">
+            <a:pPr marL="0" indent="0" algn="ctr">
+              <a:buNone/>
+            </a:pPr>
+            <a:r>
+              <a:rPr lang="en-US" sz="800" b="1" kern="0" spc="100" dirty="0">
                 <a:solidFill>
                   <a:srgbClr val="FFFFFF"/>
                 </a:solidFill>
@@ -9718,6 +10019,13 @@
             <a:prstDash val="solid"/>
           </a:ln>
         </p:spPr>
+        <p:txBody>
+          <a:bodyPr/>
+          <a:lstStyle/>
+          <a:p>
+            <a:endParaRPr lang="en-US"/>
+          </a:p>
+        </p:txBody>
       </p:sp>
       <p:sp>
         <p:nvSpPr>
@@ -9740,11 +10048,11 @@
           <a:bodyPr wrap="square" lIns="0" tIns="0" rIns="0" bIns="0" rtlCol="0" anchor="ctr"/>
           <a:lstStyle/>
           <a:p>
-            <a:pPr indent="0" marL="0">
-              <a:buNone/>
-            </a:pPr>
-            <a:r>
-              <a:rPr lang="en-US" sz="900" b="1" spc="150" kern="0" dirty="0">
+            <a:pPr marL="0" indent="0">
+              <a:buNone/>
+            </a:pPr>
+            <a:r>
+              <a:rPr lang="en-US" sz="900" b="1" kern="0" spc="150" dirty="0">
                 <a:solidFill>
                   <a:srgbClr val="D4943A"/>
                 </a:solidFill>
@@ -9779,7 +10087,7 @@
           <a:bodyPr wrap="square" lIns="0" tIns="0" rIns="0" bIns="0" rtlCol="0" anchor="t"/>
           <a:lstStyle/>
           <a:p>
-            <a:pPr indent="0" marL="0">
+            <a:pPr marL="0" indent="0">
               <a:spcAft>
                 <a:spcPts val="500"/>
               </a:spcAft>
@@ -9826,6 +10134,13 @@
             <a:prstDash val="solid"/>
           </a:ln>
         </p:spPr>
+        <p:txBody>
+          <a:bodyPr/>
+          <a:lstStyle/>
+          <a:p>
+            <a:endParaRPr lang="en-US"/>
+          </a:p>
+        </p:txBody>
       </p:sp>
       <p:sp>
         <p:nvSpPr>
@@ -9848,11 +10163,11 @@
           <a:bodyPr wrap="square" lIns="0" tIns="0" rIns="0" bIns="0" rtlCol="0" anchor="ctr"/>
           <a:lstStyle/>
           <a:p>
-            <a:pPr indent="0" marL="0">
-              <a:buNone/>
-            </a:pPr>
-            <a:r>
-              <a:rPr lang="en-US" sz="900" b="1" spc="150" kern="0" dirty="0">
+            <a:pPr marL="0" indent="0">
+              <a:buNone/>
+            </a:pPr>
+            <a:r>
+              <a:rPr lang="en-US" sz="900" b="1" kern="0" spc="150" dirty="0">
                 <a:solidFill>
                   <a:srgbClr val="55C8E8"/>
                 </a:solidFill>
@@ -9887,7 +10202,7 @@
           <a:bodyPr wrap="square" lIns="0" tIns="0" rIns="0" bIns="0" rtlCol="0" anchor="t"/>
           <a:lstStyle/>
           <a:p>
-            <a:pPr indent="0" marL="0">
+            <a:pPr marL="0" indent="0">
               <a:spcAft>
                 <a:spcPts val="400"/>
               </a:spcAft>
@@ -9907,7 +10222,7 @@
             <a:endParaRPr lang="en-US" sz="1100" dirty="0"/>
           </a:p>
           <a:p>
-            <a:pPr indent="0" marL="0">
+            <a:pPr marL="0" indent="0">
               <a:spcAft>
                 <a:spcPts val="400"/>
               </a:spcAft>
@@ -9927,7 +10242,7 @@
             <a:endParaRPr lang="en-US" sz="1100" dirty="0"/>
           </a:p>
           <a:p>
-            <a:pPr indent="0" marL="0">
+            <a:pPr marL="0" indent="0">
               <a:spcAft>
                 <a:spcPts val="400"/>
               </a:spcAft>
@@ -9997,6 +10312,13 @@
             <a:prstDash val="solid"/>
           </a:ln>
         </p:spPr>
+        <p:txBody>
+          <a:bodyPr/>
+          <a:lstStyle/>
+          <a:p>
+            <a:endParaRPr lang="en-US"/>
+          </a:p>
+        </p:txBody>
       </p:sp>
       <p:sp>
         <p:nvSpPr>
@@ -10019,11 +10341,11 @@
           <a:bodyPr wrap="square" rtlCol="0" anchor="ctr"/>
           <a:lstStyle/>
           <a:p>
-            <a:pPr indent="0" marL="0">
-              <a:buNone/>
-            </a:pPr>
-            <a:r>
-              <a:rPr lang="en-US" sz="1000" b="1" spc="150" kern="0" dirty="0">
+            <a:pPr marL="0" indent="0">
+              <a:buNone/>
+            </a:pPr>
+            <a:r>
+              <a:rPr lang="en-US" sz="1000" b="1" kern="0" spc="150" dirty="0">
                 <a:solidFill>
                   <a:srgbClr val="0E1C42"/>
                 </a:solidFill>
@@ -10061,6 +10383,13 @@
             <a:prstDash val="solid"/>
           </a:ln>
         </p:spPr>
+        <p:txBody>
+          <a:bodyPr/>
+          <a:lstStyle/>
+          <a:p>
+            <a:endParaRPr lang="en-US"/>
+          </a:p>
+        </p:txBody>
       </p:sp>
       <p:sp>
         <p:nvSpPr>
@@ -10083,7 +10412,7 @@
           <a:bodyPr wrap="square" rtlCol="0" anchor="ctr"/>
           <a:lstStyle/>
           <a:p>
-            <a:pPr indent="0" marL="0">
+            <a:pPr marL="0" indent="0">
               <a:buNone/>
             </a:pPr>
             <a:r>
@@ -10127,6 +10456,13 @@
             <a:prstDash val="solid"/>
           </a:ln>
         </p:spPr>
+        <p:txBody>
+          <a:bodyPr/>
+          <a:lstStyle/>
+          <a:p>
+            <a:endParaRPr lang="en-US"/>
+          </a:p>
+        </p:txBody>
       </p:sp>
       <p:sp>
         <p:nvSpPr>
@@ -10149,7 +10485,7 @@
           <a:bodyPr wrap="square" rtlCol="0" anchor="ctr"/>
           <a:lstStyle/>
           <a:p>
-            <a:pPr indent="0" marL="0">
+            <a:pPr marL="0" indent="0">
               <a:buNone/>
             </a:pPr>
             <a:r>
@@ -10193,6 +10529,13 @@
             <a:prstDash val="solid"/>
           </a:ln>
         </p:spPr>
+        <p:txBody>
+          <a:bodyPr/>
+          <a:lstStyle/>
+          <a:p>
+            <a:endParaRPr lang="en-US"/>
+          </a:p>
+        </p:txBody>
       </p:sp>
       <p:sp>
         <p:nvSpPr>
@@ -10215,7 +10558,7 @@
           <a:bodyPr wrap="square" rtlCol="0" anchor="ctr"/>
           <a:lstStyle/>
           <a:p>
-            <a:pPr indent="0" marL="0">
+            <a:pPr marL="0" indent="0">
               <a:buNone/>
             </a:pPr>
             <a:r>
@@ -10259,6 +10602,13 @@
             <a:prstDash val="solid"/>
           </a:ln>
         </p:spPr>
+        <p:txBody>
+          <a:bodyPr/>
+          <a:lstStyle/>
+          <a:p>
+            <a:endParaRPr lang="en-US"/>
+          </a:p>
+        </p:txBody>
       </p:sp>
       <p:sp>
         <p:nvSpPr>
@@ -10281,7 +10631,7 @@
           <a:bodyPr wrap="square" rtlCol="0" anchor="ctr"/>
           <a:lstStyle/>
           <a:p>
-            <a:pPr indent="0" marL="0">
+            <a:pPr marL="0" indent="0">
               <a:buNone/>
             </a:pPr>
             <a:r>
@@ -10325,6 +10675,13 @@
             <a:prstDash val="solid"/>
           </a:ln>
         </p:spPr>
+        <p:txBody>
+          <a:bodyPr/>
+          <a:lstStyle/>
+          <a:p>
+            <a:endParaRPr lang="en-US"/>
+          </a:p>
+        </p:txBody>
       </p:sp>
       <p:sp>
         <p:nvSpPr>
@@ -10347,7 +10704,7 @@
           <a:bodyPr wrap="square" rtlCol="0" anchor="ctr"/>
           <a:lstStyle/>
           <a:p>
-            <a:pPr indent="0" marL="0">
+            <a:pPr marL="0" indent="0">
               <a:buNone/>
             </a:pPr>
             <a:r>
@@ -10391,6 +10748,13 @@
             <a:prstDash val="solid"/>
           </a:ln>
         </p:spPr>
+        <p:txBody>
+          <a:bodyPr/>
+          <a:lstStyle/>
+          <a:p>
+            <a:endParaRPr lang="en-US"/>
+          </a:p>
+        </p:txBody>
       </p:sp>
       <p:sp>
         <p:nvSpPr>
@@ -10413,7 +10777,7 @@
           <a:bodyPr wrap="square" rtlCol="0" anchor="ctr"/>
           <a:lstStyle/>
           <a:p>
-            <a:pPr indent="0" marL="0">
+            <a:pPr marL="0" indent="0">
               <a:buNone/>
             </a:pPr>
             <a:r>
@@ -10457,6 +10821,13 @@
             <a:prstDash val="solid"/>
           </a:ln>
         </p:spPr>
+        <p:txBody>
+          <a:bodyPr/>
+          <a:lstStyle/>
+          <a:p>
+            <a:endParaRPr lang="en-US"/>
+          </a:p>
+        </p:txBody>
       </p:sp>
       <p:sp>
         <p:nvSpPr>
@@ -10479,7 +10850,7 @@
           <a:bodyPr wrap="square" rtlCol="0" anchor="ctr"/>
           <a:lstStyle/>
           <a:p>
-            <a:pPr indent="0" marL="0">
+            <a:pPr marL="0" indent="0">
               <a:buNone/>
             </a:pPr>
             <a:r>
@@ -10546,6 +10917,13 @@
             <a:prstDash val="solid"/>
           </a:ln>
         </p:spPr>
+        <p:txBody>
+          <a:bodyPr/>
+          <a:lstStyle/>
+          <a:p>
+            <a:endParaRPr lang="en-US"/>
+          </a:p>
+        </p:txBody>
       </p:sp>
       <p:sp>
         <p:nvSpPr>
@@ -10568,11 +10946,11 @@
           <a:bodyPr wrap="square" rtlCol="0" anchor="ctr"/>
           <a:lstStyle/>
           <a:p>
-            <a:pPr indent="0" marL="0">
-              <a:buNone/>
-            </a:pPr>
-            <a:r>
-              <a:rPr lang="en-US" sz="1000" b="1" spc="150" kern="0" dirty="0">
+            <a:pPr marL="0" indent="0">
+              <a:buNone/>
+            </a:pPr>
+            <a:r>
+              <a:rPr lang="en-US" sz="1000" b="1" kern="0" spc="150" dirty="0">
                 <a:solidFill>
                   <a:srgbClr val="0E1C42"/>
                 </a:solidFill>
@@ -10610,6 +10988,13 @@
             <a:prstDash val="solid"/>
           </a:ln>
         </p:spPr>
+        <p:txBody>
+          <a:bodyPr/>
+          <a:lstStyle/>
+          <a:p>
+            <a:endParaRPr lang="en-US"/>
+          </a:p>
+        </p:txBody>
       </p:sp>
       <p:sp>
         <p:nvSpPr>
@@ -10637,6 +11022,13 @@
             <a:prstDash val="solid"/>
           </a:ln>
         </p:spPr>
+        <p:txBody>
+          <a:bodyPr/>
+          <a:lstStyle/>
+          <a:p>
+            <a:endParaRPr lang="en-US"/>
+          </a:p>
+        </p:txBody>
       </p:sp>
       <p:sp>
         <p:nvSpPr>
@@ -10659,11 +11051,11 @@
           <a:bodyPr wrap="square" rtlCol="0" anchor="ctr"/>
           <a:lstStyle/>
           <a:p>
-            <a:pPr indent="0" marL="0">
-              <a:buNone/>
-            </a:pPr>
-            <a:r>
-              <a:rPr lang="en-US" sz="900" b="1" spc="150" kern="0" dirty="0">
+            <a:pPr marL="0" indent="0">
+              <a:buNone/>
+            </a:pPr>
+            <a:r>
+              <a:rPr lang="en-US" sz="900" b="1" kern="0" spc="150" dirty="0">
                 <a:solidFill>
                   <a:srgbClr val="8B6FC0"/>
                 </a:solidFill>
@@ -10703,6 +11095,13 @@
             <a:prstDash val="solid"/>
           </a:ln>
         </p:spPr>
+        <p:txBody>
+          <a:bodyPr/>
+          <a:lstStyle/>
+          <a:p>
+            <a:endParaRPr lang="en-US"/>
+          </a:p>
+        </p:txBody>
       </p:sp>
       <p:sp>
         <p:nvSpPr>
@@ -10725,7 +11124,7 @@
           <a:bodyPr wrap="square" rtlCol="0" anchor="t"/>
           <a:lstStyle/>
           <a:p>
-            <a:pPr indent="0" marL="0">
+            <a:pPr marL="0" indent="0">
               <a:buNone/>
             </a:pPr>
             <a:r>
@@ -10769,6 +11168,13 @@
             <a:prstDash val="solid"/>
           </a:ln>
         </p:spPr>
+        <p:txBody>
+          <a:bodyPr/>
+          <a:lstStyle/>
+          <a:p>
+            <a:endParaRPr lang="en-US"/>
+          </a:p>
+        </p:txBody>
       </p:sp>
       <p:sp>
         <p:nvSpPr>
@@ -10791,7 +11197,7 @@
           <a:bodyPr wrap="square" rtlCol="0" anchor="t"/>
           <a:lstStyle/>
           <a:p>
-            <a:pPr indent="0" marL="0">
+            <a:pPr marL="0" indent="0">
               <a:buNone/>
             </a:pPr>
             <a:r>
@@ -10835,6 +11241,13 @@
             <a:prstDash val="solid"/>
           </a:ln>
         </p:spPr>
+        <p:txBody>
+          <a:bodyPr/>
+          <a:lstStyle/>
+          <a:p>
+            <a:endParaRPr lang="en-US"/>
+          </a:p>
+        </p:txBody>
       </p:sp>
       <p:sp>
         <p:nvSpPr>
@@ -10857,7 +11270,7 @@
           <a:bodyPr wrap="square" rtlCol="0" anchor="t"/>
           <a:lstStyle/>
           <a:p>
-            <a:pPr indent="0" marL="0">
+            <a:pPr marL="0" indent="0">
               <a:buNone/>
             </a:pPr>
             <a:r>
@@ -10901,6 +11314,13 @@
             <a:prstDash val="solid"/>
           </a:ln>
         </p:spPr>
+        <p:txBody>
+          <a:bodyPr/>
+          <a:lstStyle/>
+          <a:p>
+            <a:endParaRPr lang="en-US"/>
+          </a:p>
+        </p:txBody>
       </p:sp>
       <p:sp>
         <p:nvSpPr>
@@ -10923,11 +11343,11 @@
           <a:bodyPr wrap="square" rtlCol="0" anchor="ctr"/>
           <a:lstStyle/>
           <a:p>
-            <a:pPr indent="0" marL="0">
-              <a:buNone/>
-            </a:pPr>
-            <a:r>
-              <a:rPr lang="en-US" sz="900" b="1" spc="150" kern="0" dirty="0">
+            <a:pPr marL="0" indent="0">
+              <a:buNone/>
+            </a:pPr>
+            <a:r>
+              <a:rPr lang="en-US" sz="900" b="1" kern="0" spc="150" dirty="0">
                 <a:solidFill>
                   <a:srgbClr val="D4943A"/>
                 </a:solidFill>
@@ -10962,7 +11382,7 @@
           <a:bodyPr wrap="square" rtlCol="0" anchor="t"/>
           <a:lstStyle/>
           <a:p>
-            <a:pPr indent="0" marL="0">
+            <a:pPr marL="0" indent="0">
               <a:buNone/>
             </a:pPr>
             <a:r>
@@ -11001,7 +11421,7 @@
           <a:bodyPr wrap="square" rtlCol="0" anchor="t"/>
           <a:lstStyle/>
           <a:p>
-            <a:pPr indent="0" marL="0">
+            <a:pPr marL="0" indent="0">
               <a:buNone/>
             </a:pPr>
             <a:r>
@@ -11040,7 +11460,7 @@
           <a:bodyPr wrap="square" rtlCol="0" anchor="t"/>
           <a:lstStyle/>
           <a:p>
-            <a:pPr indent="0" marL="0">
+            <a:pPr marL="0" indent="0">
               <a:buNone/>
             </a:pPr>
             <a:r>
@@ -11084,6 +11504,13 @@
             <a:prstDash val="solid"/>
           </a:ln>
         </p:spPr>
+        <p:txBody>
+          <a:bodyPr/>
+          <a:lstStyle/>
+          <a:p>
+            <a:endParaRPr lang="en-US"/>
+          </a:p>
+        </p:txBody>
       </p:sp>
       <p:sp>
         <p:nvSpPr>
@@ -11106,11 +11533,11 @@
           <a:bodyPr wrap="square" rtlCol="0" anchor="ctr"/>
           <a:lstStyle/>
           <a:p>
-            <a:pPr indent="0" marL="0">
-              <a:buNone/>
-            </a:pPr>
-            <a:r>
-              <a:rPr lang="en-US" sz="900" b="1" spc="150" kern="0" dirty="0">
+            <a:pPr marL="0" indent="0">
+              <a:buNone/>
+            </a:pPr>
+            <a:r>
+              <a:rPr lang="en-US" sz="900" b="1" kern="0" spc="150" dirty="0">
                 <a:solidFill>
                   <a:srgbClr val="34B76F"/>
                 </a:solidFill>
@@ -11145,7 +11572,7 @@
           <a:bodyPr wrap="square" rtlCol="0" anchor="t"/>
           <a:lstStyle/>
           <a:p>
-            <a:pPr indent="0" marL="0">
+            <a:pPr marL="0" indent="0">
               <a:buNone/>
             </a:pPr>
             <a:r>
@@ -11189,6 +11616,13 @@
             <a:prstDash val="solid"/>
           </a:ln>
         </p:spPr>
+        <p:txBody>
+          <a:bodyPr/>
+          <a:lstStyle/>
+          <a:p>
+            <a:endParaRPr lang="en-US"/>
+          </a:p>
+        </p:txBody>
       </p:sp>
       <p:sp>
         <p:nvSpPr>
@@ -11211,11 +11645,11 @@
           <a:bodyPr wrap="square" rtlCol="0" anchor="ctr"/>
           <a:lstStyle/>
           <a:p>
-            <a:pPr indent="0" marL="0">
-              <a:buNone/>
-            </a:pPr>
-            <a:r>
-              <a:rPr lang="en-US" sz="900" b="1" spc="150" kern="0" dirty="0">
+            <a:pPr marL="0" indent="0">
+              <a:buNone/>
+            </a:pPr>
+            <a:r>
+              <a:rPr lang="en-US" sz="900" b="1" kern="0" spc="150" dirty="0">
                 <a:solidFill>
                   <a:srgbClr val="55C8E8"/>
                 </a:solidFill>
@@ -11250,7 +11684,7 @@
           <a:bodyPr wrap="square" lIns="0" tIns="0" rIns="0" bIns="0" rtlCol="0" anchor="t"/>
           <a:lstStyle/>
           <a:p>
-            <a:pPr indent="0" marL="0">
+            <a:pPr marL="0" indent="0">
               <a:buNone/>
             </a:pPr>
             <a:r>
@@ -11267,7 +11701,7 @@
             <a:endParaRPr lang="en-US" sz="900" dirty="0"/>
           </a:p>
           <a:p>
-            <a:pPr indent="0" marL="0">
+            <a:pPr marL="0" indent="0">
               <a:buNone/>
             </a:pPr>
             <a:r>
@@ -11284,7 +11718,7 @@
             <a:endParaRPr lang="en-US" sz="900" dirty="0"/>
           </a:p>
           <a:p>
-            <a:pPr indent="0" marL="0">
+            <a:pPr marL="0" indent="0">
               <a:buNone/>
             </a:pPr>
             <a:r>
@@ -11301,7 +11735,7 @@
             <a:endParaRPr lang="en-US" sz="900" dirty="0"/>
           </a:p>
           <a:p>
-            <a:pPr indent="0" marL="0">
+            <a:pPr marL="0" indent="0">
               <a:buNone/>
             </a:pPr>
             <a:r>
@@ -11318,7 +11752,7 @@
             <a:endParaRPr lang="en-US" sz="900" dirty="0"/>
           </a:p>
           <a:p>
-            <a:pPr indent="0" marL="0">
+            <a:pPr marL="0" indent="0">
               <a:buNone/>
             </a:pPr>
             <a:r>
@@ -11385,6 +11819,13 @@
             <a:prstDash val="dash"/>
           </a:ln>
         </p:spPr>
+        <p:txBody>
+          <a:bodyPr/>
+          <a:lstStyle/>
+          <a:p>
+            <a:endParaRPr lang="en-US"/>
+          </a:p>
+        </p:txBody>
       </p:sp>
       <p:sp>
         <p:nvSpPr>
@@ -11407,6 +11848,13 @@
           </a:solidFill>
           <a:ln/>
         </p:spPr>
+        <p:txBody>
+          <a:bodyPr/>
+          <a:lstStyle/>
+          <a:p>
+            <a:endParaRPr lang="en-US"/>
+          </a:p>
+        </p:txBody>
       </p:sp>
       <p:sp>
         <p:nvSpPr>
@@ -11434,6 +11882,13 @@
             <a:prstDash val="solid"/>
           </a:ln>
         </p:spPr>
+        <p:txBody>
+          <a:bodyPr/>
+          <a:lstStyle/>
+          <a:p>
+            <a:endParaRPr lang="en-US"/>
+          </a:p>
+        </p:txBody>
       </p:sp>
       <p:sp>
         <p:nvSpPr>
@@ -11456,11 +11911,11 @@
           <a:bodyPr wrap="square" rtlCol="0" anchor="ctr"/>
           <a:lstStyle/>
           <a:p>
-            <a:pPr algn="ctr" indent="0" marL="0">
-              <a:buNone/>
-            </a:pPr>
-            <a:r>
-              <a:rPr lang="en-US" sz="2000" b="1" spc="200" kern="0" dirty="0">
+            <a:pPr marL="0" indent="0" algn="ctr">
+              <a:buNone/>
+            </a:pPr>
+            <a:r>
+              <a:rPr lang="en-US" sz="2000" b="1" kern="0" spc="200" dirty="0">
                 <a:solidFill>
                   <a:srgbClr val="FFFFFF"/>
                 </a:solidFill>
@@ -11495,7 +11950,7 @@
           <a:bodyPr wrap="square" rtlCol="0" anchor="ctr"/>
           <a:lstStyle/>
           <a:p>
-            <a:pPr algn="ctr" indent="0" marL="0">
+            <a:pPr marL="0" indent="0" algn="ctr">
               <a:buNone/>
             </a:pPr>
             <a:r>
@@ -11534,7 +11989,7 @@
           <a:bodyPr wrap="square" rtlCol="0" anchor="ctr"/>
           <a:lstStyle/>
           <a:p>
-            <a:pPr algn="ctr" indent="0" marL="0">
+            <a:pPr marL="0" indent="0" algn="ctr">
               <a:buNone/>
             </a:pPr>
             <a:r>
@@ -11576,6 +12031,13 @@
             <a:prstDash val="solid"/>
           </a:ln>
         </p:spPr>
+        <p:txBody>
+          <a:bodyPr/>
+          <a:lstStyle/>
+          <a:p>
+            <a:endParaRPr lang="en-US"/>
+          </a:p>
+        </p:txBody>
       </p:sp>
       <p:sp>
         <p:nvSpPr>
@@ -11605,6 +12067,13 @@
             <a:prstDash val="solid"/>
           </a:ln>
         </p:spPr>
+        <p:txBody>
+          <a:bodyPr/>
+          <a:lstStyle/>
+          <a:p>
+            <a:endParaRPr lang="en-US"/>
+          </a:p>
+        </p:txBody>
       </p:sp>
       <p:sp>
         <p:nvSpPr>
@@ -11627,11 +12096,11 @@
           <a:bodyPr wrap="square" rtlCol="0" anchor="ctr"/>
           <a:lstStyle/>
           <a:p>
-            <a:pPr algn="ctr" indent="0" marL="0">
-              <a:buNone/>
-            </a:pPr>
-            <a:r>
-              <a:rPr lang="en-US" sz="1000" b="1" spc="150" kern="0" dirty="0">
+            <a:pPr marL="0" indent="0" algn="ctr">
+              <a:buNone/>
+            </a:pPr>
+            <a:r>
+              <a:rPr lang="en-US" sz="1000" b="1" kern="0" spc="150" dirty="0">
                 <a:solidFill>
                   <a:srgbClr val="55C8E8"/>
                 </a:solidFill>
@@ -11666,7 +12135,7 @@
           <a:bodyPr wrap="square" rtlCol="0" anchor="t"/>
           <a:lstStyle/>
           <a:p>
-            <a:pPr algn="ctr" indent="0" marL="0">
+            <a:pPr marL="0" indent="0" algn="ctr">
               <a:buNone/>
             </a:pPr>
             <a:r>
@@ -11705,7 +12174,7 @@
           <a:bodyPr wrap="square" rtlCol="0" anchor="ctr"/>
           <a:lstStyle/>
           <a:p>
-            <a:pPr algn="ctr" indent="0" marL="0">
+            <a:pPr marL="0" indent="0" algn="ctr">
               <a:buNone/>
             </a:pPr>
             <a:r>
@@ -11772,6 +12241,13 @@
             <a:prstDash val="solid"/>
           </a:ln>
         </p:spPr>
+        <p:txBody>
+          <a:bodyPr/>
+          <a:lstStyle/>
+          <a:p>
+            <a:endParaRPr lang="en-US"/>
+          </a:p>
+        </p:txBody>
       </p:sp>
       <p:sp>
         <p:nvSpPr>
@@ -11794,11 +12270,11 @@
           <a:bodyPr wrap="square" rtlCol="0" anchor="ctr"/>
           <a:lstStyle/>
           <a:p>
-            <a:pPr indent="0" marL="0">
-              <a:buNone/>
-            </a:pPr>
-            <a:r>
-              <a:rPr lang="en-US" sz="1000" b="1" spc="150" kern="0" dirty="0">
+            <a:pPr marL="0" indent="0">
+              <a:buNone/>
+            </a:pPr>
+            <a:r>
+              <a:rPr lang="en-US" sz="1000" b="1" kern="0" spc="150" dirty="0">
                 <a:solidFill>
                   <a:srgbClr val="D4943A"/>
                 </a:solidFill>
@@ -11836,6 +12312,13 @@
             <a:prstDash val="solid"/>
           </a:ln>
         </p:spPr>
+        <p:txBody>
+          <a:bodyPr/>
+          <a:lstStyle/>
+          <a:p>
+            <a:endParaRPr lang="en-US"/>
+          </a:p>
+        </p:txBody>
       </p:sp>
       <p:sp>
         <p:nvSpPr>
@@ -11863,6 +12346,13 @@
             <a:prstDash val="solid"/>
           </a:ln>
         </p:spPr>
+        <p:txBody>
+          <a:bodyPr/>
+          <a:lstStyle/>
+          <a:p>
+            <a:endParaRPr lang="en-US"/>
+          </a:p>
+        </p:txBody>
       </p:sp>
       <p:sp>
         <p:nvSpPr>
@@ -11885,7 +12375,7 @@
           <a:bodyPr wrap="square" rtlCol="0" anchor="ctr"/>
           <a:lstStyle/>
           <a:p>
-            <a:pPr indent="0" marL="0">
+            <a:pPr marL="0" indent="0">
               <a:buNone/>
             </a:pPr>
             <a:r>
@@ -11924,7 +12414,7 @@
           <a:bodyPr wrap="square" rtlCol="0" anchor="ctr"/>
           <a:lstStyle/>
           <a:p>
-            <a:pPr indent="0" marL="0">
+            <a:pPr marL="0" indent="0">
               <a:buNone/>
             </a:pPr>
             <a:r>
@@ -11963,7 +12453,7 @@
           <a:bodyPr wrap="square" rtlCol="0" anchor="ctr"/>
           <a:lstStyle/>
           <a:p>
-            <a:pPr indent="0" marL="0">
+            <a:pPr marL="0" indent="0">
               <a:buNone/>
             </a:pPr>
             <a:r>
@@ -12005,6 +12495,13 @@
             <a:prstDash val="solid"/>
           </a:ln>
         </p:spPr>
+        <p:txBody>
+          <a:bodyPr/>
+          <a:lstStyle/>
+          <a:p>
+            <a:endParaRPr lang="en-US"/>
+          </a:p>
+        </p:txBody>
       </p:sp>
       <p:sp>
         <p:nvSpPr>
@@ -12027,7 +12524,7 @@
           <a:bodyPr wrap="square" rtlCol="0" anchor="t"/>
           <a:lstStyle/>
           <a:p>
-            <a:pPr indent="0" marL="0">
+            <a:pPr marL="0" indent="0">
               <a:buNone/>
             </a:pPr>
             <a:r>
@@ -12044,13 +12541,13 @@
             <a:endParaRPr lang="en-US" sz="1300" dirty="0"/>
           </a:p>
           <a:p>
-            <a:pPr indent="0" marL="0">
+            <a:pPr marL="0" indent="0">
               <a:buNone/>
             </a:pPr>
             <a:endParaRPr lang="en-US" sz="1300" dirty="0"/>
           </a:p>
           <a:p>
-            <a:pPr indent="0" marL="0">
+            <a:pPr marL="0" indent="0">
               <a:buNone/>
             </a:pPr>
             <a:r>
@@ -12089,7 +12586,7 @@
           <a:bodyPr wrap="square" rtlCol="0" anchor="ctr"/>
           <a:lstStyle/>
           <a:p>
-            <a:pPr algn="ctr" indent="0" marL="0">
+            <a:pPr marL="0" indent="0" algn="ctr">
               <a:buNone/>
             </a:pPr>
             <a:r>
@@ -12156,6 +12653,13 @@
             <a:prstDash val="solid"/>
           </a:ln>
         </p:spPr>
+        <p:txBody>
+          <a:bodyPr/>
+          <a:lstStyle/>
+          <a:p>
+            <a:endParaRPr lang="en-US"/>
+          </a:p>
+        </p:txBody>
       </p:sp>
       <p:sp>
         <p:nvSpPr>
@@ -12178,11 +12682,11 @@
           <a:bodyPr wrap="square" rtlCol="0" anchor="ctr"/>
           <a:lstStyle/>
           <a:p>
-            <a:pPr indent="0" marL="0">
-              <a:buNone/>
-            </a:pPr>
-            <a:r>
-              <a:rPr lang="en-US" sz="1000" b="1" spc="150" kern="0" dirty="0">
+            <a:pPr marL="0" indent="0">
+              <a:buNone/>
+            </a:pPr>
+            <a:r>
+              <a:rPr lang="en-US" sz="1000" b="1" kern="0" spc="150" dirty="0">
                 <a:solidFill>
                   <a:srgbClr val="1A8A7D"/>
                 </a:solidFill>
@@ -12220,6 +12724,13 @@
             <a:prstDash val="solid"/>
           </a:ln>
         </p:spPr>
+        <p:txBody>
+          <a:bodyPr/>
+          <a:lstStyle/>
+          <a:p>
+            <a:endParaRPr lang="en-US"/>
+          </a:p>
+        </p:txBody>
       </p:sp>
       <p:sp>
         <p:nvSpPr>
@@ -12242,7 +12753,7 @@
           <a:bodyPr wrap="square" rtlCol="0" anchor="ctr"/>
           <a:lstStyle/>
           <a:p>
-            <a:pPr indent="0" marL="0">
+            <a:pPr marL="0" indent="0">
               <a:buNone/>
             </a:pPr>
             <a:r>
@@ -12286,6 +12797,13 @@
             <a:prstDash val="solid"/>
           </a:ln>
         </p:spPr>
+        <p:txBody>
+          <a:bodyPr/>
+          <a:lstStyle/>
+          <a:p>
+            <a:endParaRPr lang="en-US"/>
+          </a:p>
+        </p:txBody>
       </p:sp>
       <p:sp>
         <p:nvSpPr>
@@ -12308,11 +12826,11 @@
           <a:bodyPr wrap="square" rtlCol="0" anchor="ctr"/>
           <a:lstStyle/>
           <a:p>
-            <a:pPr indent="0" marL="0">
-              <a:buNone/>
-            </a:pPr>
-            <a:r>
-              <a:rPr lang="en-US" sz="900" b="1" spc="150" kern="0" dirty="0">
+            <a:pPr marL="0" indent="0">
+              <a:buNone/>
+            </a:pPr>
+            <a:r>
+              <a:rPr lang="en-US" sz="900" b="1" kern="0" spc="150" dirty="0">
                 <a:solidFill>
                   <a:srgbClr val="E8636B"/>
                 </a:solidFill>
@@ -12347,7 +12865,7 @@
           <a:bodyPr wrap="square" rtlCol="0" anchor="t"/>
           <a:lstStyle/>
           <a:p>
-            <a:pPr indent="0" marL="0">
+            <a:pPr marL="0" indent="0">
               <a:buNone/>
             </a:pPr>
             <a:r>
@@ -12391,6 +12909,13 @@
             <a:prstDash val="solid"/>
           </a:ln>
         </p:spPr>
+        <p:txBody>
+          <a:bodyPr/>
+          <a:lstStyle/>
+          <a:p>
+            <a:endParaRPr lang="en-US"/>
+          </a:p>
+        </p:txBody>
       </p:sp>
       <p:sp>
         <p:nvSpPr>
@@ -12413,11 +12938,11 @@
           <a:bodyPr wrap="square" rtlCol="0" anchor="ctr"/>
           <a:lstStyle/>
           <a:p>
-            <a:pPr indent="0" marL="0">
-              <a:buNone/>
-            </a:pPr>
-            <a:r>
-              <a:rPr lang="en-US" sz="900" b="1" spc="150" kern="0" dirty="0">
+            <a:pPr marL="0" indent="0">
+              <a:buNone/>
+            </a:pPr>
+            <a:r>
+              <a:rPr lang="en-US" sz="900" b="1" kern="0" spc="150" dirty="0">
                 <a:solidFill>
                   <a:srgbClr val="1A8A7D"/>
                 </a:solidFill>
@@ -12452,7 +12977,7 @@
           <a:bodyPr wrap="square" rtlCol="0" anchor="t"/>
           <a:lstStyle/>
           <a:p>
-            <a:pPr indent="0" marL="0">
+            <a:pPr marL="0" indent="0">
               <a:buNone/>
             </a:pPr>
             <a:r>
@@ -12496,6 +13021,13 @@
             <a:prstDash val="solid"/>
           </a:ln>
         </p:spPr>
+        <p:txBody>
+          <a:bodyPr/>
+          <a:lstStyle/>
+          <a:p>
+            <a:endParaRPr lang="en-US"/>
+          </a:p>
+        </p:txBody>
       </p:sp>
       <p:sp>
         <p:nvSpPr>
@@ -12518,7 +13050,7 @@
           <a:bodyPr wrap="square" rtlCol="0" anchor="ctr"/>
           <a:lstStyle/>
           <a:p>
-            <a:pPr algn="ctr" indent="0" marL="0">
+            <a:pPr marL="0" indent="0" algn="ctr">
               <a:buNone/>
             </a:pPr>
             <a:r>
@@ -12562,6 +13094,13 @@
             <a:prstDash val="solid"/>
           </a:ln>
         </p:spPr>
+        <p:txBody>
+          <a:bodyPr/>
+          <a:lstStyle/>
+          <a:p>
+            <a:endParaRPr lang="en-US"/>
+          </a:p>
+        </p:txBody>
       </p:sp>
       <p:sp>
         <p:nvSpPr>
@@ -12584,11 +13123,11 @@
           <a:bodyPr wrap="square" lIns="0" tIns="0" rIns="0" bIns="0" rtlCol="0" anchor="ctr"/>
           <a:lstStyle/>
           <a:p>
-            <a:pPr indent="0" marL="0">
-              <a:buNone/>
-            </a:pPr>
-            <a:r>
-              <a:rPr lang="en-US" sz="900" b="1" spc="150" kern="0" dirty="0">
+            <a:pPr marL="0" indent="0">
+              <a:buNone/>
+            </a:pPr>
+            <a:r>
+              <a:rPr lang="en-US" sz="900" b="1" kern="0" spc="150" dirty="0">
                 <a:solidFill>
                   <a:srgbClr val="D4943A"/>
                 </a:solidFill>
@@ -12623,7 +13162,7 @@
           <a:bodyPr wrap="square" lIns="0" tIns="0" rIns="0" bIns="0" rtlCol="0" anchor="t"/>
           <a:lstStyle/>
           <a:p>
-            <a:pPr indent="0" marL="0">
+            <a:pPr marL="0" indent="0">
               <a:spcAft>
                 <a:spcPts val="500"/>
               </a:spcAft>
@@ -12693,6 +13232,13 @@
             <a:prstDash val="solid"/>
           </a:ln>
         </p:spPr>
+        <p:txBody>
+          <a:bodyPr/>
+          <a:lstStyle/>
+          <a:p>
+            <a:endParaRPr lang="en-US"/>
+          </a:p>
+        </p:txBody>
       </p:sp>
       <p:sp>
         <p:nvSpPr>
@@ -12715,11 +13261,11 @@
           <a:bodyPr wrap="square" rtlCol="0" anchor="ctr"/>
           <a:lstStyle/>
           <a:p>
-            <a:pPr indent="0" marL="0">
-              <a:buNone/>
-            </a:pPr>
-            <a:r>
-              <a:rPr lang="en-US" sz="1000" b="1" spc="150" kern="0" dirty="0">
+            <a:pPr marL="0" indent="0">
+              <a:buNone/>
+            </a:pPr>
+            <a:r>
+              <a:rPr lang="en-US" sz="1000" b="1" kern="0" spc="150" dirty="0">
                 <a:solidFill>
                   <a:srgbClr val="0E1C42"/>
                 </a:solidFill>
@@ -12757,6 +13303,13 @@
             <a:prstDash val="solid"/>
           </a:ln>
         </p:spPr>
+        <p:txBody>
+          <a:bodyPr/>
+          <a:lstStyle/>
+          <a:p>
+            <a:endParaRPr lang="en-US"/>
+          </a:p>
+        </p:txBody>
       </p:sp>
       <p:sp>
         <p:nvSpPr>
@@ -12784,6 +13337,13 @@
             <a:prstDash val="solid"/>
           </a:ln>
         </p:spPr>
+        <p:txBody>
+          <a:bodyPr/>
+          <a:lstStyle/>
+          <a:p>
+            <a:endParaRPr lang="en-US"/>
+          </a:p>
+        </p:txBody>
       </p:sp>
       <p:sp>
         <p:nvSpPr>
@@ -12806,11 +13366,11 @@
           <a:bodyPr wrap="square" lIns="0" tIns="0" rIns="0" bIns="0" rtlCol="0" anchor="ctr"/>
           <a:lstStyle/>
           <a:p>
-            <a:pPr indent="0" marL="0">
-              <a:buNone/>
-            </a:pPr>
-            <a:r>
-              <a:rPr lang="en-US" sz="900" b="1" spc="150" kern="0" dirty="0">
+            <a:pPr marL="0" indent="0">
+              <a:buNone/>
+            </a:pPr>
+            <a:r>
+              <a:rPr lang="en-US" sz="900" b="1" kern="0" spc="150" dirty="0">
                 <a:solidFill>
                   <a:srgbClr val="55C8E8"/>
                 </a:solidFill>
@@ -12845,7 +13405,7 @@
           <a:bodyPr wrap="square" lIns="0" tIns="0" rIns="0" bIns="0" rtlCol="0" anchor="t"/>
           <a:lstStyle/>
           <a:p>
-            <a:pPr indent="0" marL="0">
+            <a:pPr marL="0" indent="0">
               <a:spcAft>
                 <a:spcPts val="400"/>
               </a:spcAft>
@@ -12865,7 +13425,7 @@
             <a:endParaRPr lang="en-US" sz="1100" dirty="0"/>
           </a:p>
           <a:p>
-            <a:pPr indent="0" marL="0">
+            <a:pPr marL="0" indent="0">
               <a:spcAft>
                 <a:spcPts val="400"/>
               </a:spcAft>
@@ -12885,7 +13445,7 @@
             <a:endParaRPr lang="en-US" sz="1100" dirty="0"/>
           </a:p>
           <a:p>
-            <a:pPr indent="0" marL="0">
+            <a:pPr marL="0" indent="0">
               <a:spcAft>
                 <a:spcPts val="400"/>
               </a:spcAft>
@@ -12905,7 +13465,7 @@
             <a:endParaRPr lang="en-US" sz="1100" dirty="0"/>
           </a:p>
           <a:p>
-            <a:pPr indent="0" marL="0">
+            <a:pPr marL="0" indent="0">
               <a:spcAft>
                 <a:spcPts val="400"/>
               </a:spcAft>
@@ -12952,6 +13512,13 @@
             <a:prstDash val="solid"/>
           </a:ln>
         </p:spPr>
+        <p:txBody>
+          <a:bodyPr/>
+          <a:lstStyle/>
+          <a:p>
+            <a:endParaRPr lang="en-US"/>
+          </a:p>
+        </p:txBody>
       </p:sp>
       <p:sp>
         <p:nvSpPr>
@@ -12974,11 +13541,11 @@
           <a:bodyPr wrap="square" lIns="0" tIns="0" rIns="0" bIns="0" rtlCol="0" anchor="ctr"/>
           <a:lstStyle/>
           <a:p>
-            <a:pPr indent="0" marL="0">
-              <a:buNone/>
-            </a:pPr>
-            <a:r>
-              <a:rPr lang="en-US" sz="900" b="1" spc="150" kern="0" dirty="0">
+            <a:pPr marL="0" indent="0">
+              <a:buNone/>
+            </a:pPr>
+            <a:r>
+              <a:rPr lang="en-US" sz="900" b="1" kern="0" spc="150" dirty="0">
                 <a:solidFill>
                   <a:srgbClr val="D4943A"/>
                 </a:solidFill>
@@ -13013,7 +13580,7 @@
           <a:bodyPr wrap="square" lIns="0" tIns="0" rIns="0" bIns="0" rtlCol="0" anchor="t"/>
           <a:lstStyle/>
           <a:p>
-            <a:pPr indent="0" marL="0">
+            <a:pPr marL="0" indent="0">
               <a:spcAft>
                 <a:spcPts val="500"/>
               </a:spcAft>
@@ -13033,7 +13600,7 @@
             <a:endParaRPr lang="en-US" sz="1200" dirty="0"/>
           </a:p>
           <a:p>
-            <a:pPr indent="0" marL="0">
+            <a:pPr marL="0" indent="0">
               <a:spcAft>
                 <a:spcPts val="500"/>
               </a:spcAft>
@@ -13080,6 +13647,13 @@
             <a:prstDash val="solid"/>
           </a:ln>
         </p:spPr>
+        <p:txBody>
+          <a:bodyPr/>
+          <a:lstStyle/>
+          <a:p>
+            <a:endParaRPr lang="en-US"/>
+          </a:p>
+        </p:txBody>
       </p:sp>
       <p:sp>
         <p:nvSpPr>
@@ -13102,11 +13676,11 @@
           <a:bodyPr wrap="square" rtlCol="0" anchor="ctr"/>
           <a:lstStyle/>
           <a:p>
-            <a:pPr indent="0" marL="0">
-              <a:buNone/>
-            </a:pPr>
-            <a:r>
-              <a:rPr lang="en-US" sz="900" b="1" spc="150" kern="0" dirty="0">
+            <a:pPr marL="0" indent="0">
+              <a:buNone/>
+            </a:pPr>
+            <a:r>
+              <a:rPr lang="en-US" sz="900" b="1" kern="0" spc="150" dirty="0">
                 <a:solidFill>
                   <a:srgbClr val="D4943A"/>
                 </a:solidFill>
@@ -13141,7 +13715,7 @@
           <a:bodyPr wrap="square" rtlCol="0" anchor="t"/>
           <a:lstStyle/>
           <a:p>
-            <a:pPr indent="0" marL="0">
+            <a:pPr marL="0" indent="0">
               <a:buNone/>
             </a:pPr>
             <a:r>
@@ -13158,13 +13732,13 @@
             <a:endParaRPr lang="en-US" sz="1200" dirty="0"/>
           </a:p>
           <a:p>
-            <a:pPr indent="0" marL="0">
+            <a:pPr marL="0" indent="0">
               <a:buNone/>
             </a:pPr>
             <a:endParaRPr lang="en-US" sz="1200" dirty="0"/>
           </a:p>
           <a:p>
-            <a:pPr indent="0" marL="0">
+            <a:pPr marL="0" indent="0">
               <a:buNone/>
             </a:pPr>
             <a:r>
@@ -13181,13 +13755,13 @@
             <a:endParaRPr lang="en-US" sz="1200" dirty="0"/>
           </a:p>
           <a:p>
-            <a:pPr indent="0" marL="0">
+            <a:pPr marL="0" indent="0">
               <a:buNone/>
             </a:pPr>
             <a:endParaRPr lang="en-US" sz="1200" dirty="0"/>
           </a:p>
           <a:p>
-            <a:pPr indent="0" marL="0">
+            <a:pPr marL="0" indent="0">
               <a:buNone/>
             </a:pPr>
             <a:r>
@@ -13254,6 +13828,13 @@
             <a:prstDash val="dash"/>
           </a:ln>
         </p:spPr>
+        <p:txBody>
+          <a:bodyPr/>
+          <a:lstStyle/>
+          <a:p>
+            <a:endParaRPr lang="en-US"/>
+          </a:p>
+        </p:txBody>
       </p:sp>
       <p:sp>
         <p:nvSpPr>
@@ -13276,6 +13857,13 @@
           </a:solidFill>
           <a:ln/>
         </p:spPr>
+        <p:txBody>
+          <a:bodyPr/>
+          <a:lstStyle/>
+          <a:p>
+            <a:endParaRPr lang="en-US"/>
+          </a:p>
+        </p:txBody>
       </p:sp>
       <p:sp>
         <p:nvSpPr>
@@ -13298,11 +13886,11 @@
           <a:bodyPr wrap="square" rtlCol="0" anchor="ctr"/>
           <a:lstStyle/>
           <a:p>
-            <a:pPr algn="ctr" indent="0" marL="0">
-              <a:buNone/>
-            </a:pPr>
-            <a:r>
-              <a:rPr lang="en-US" sz="1300" b="1" spc="200" kern="0" dirty="0">
+            <a:pPr marL="0" indent="0" algn="ctr">
+              <a:buNone/>
+            </a:pPr>
+            <a:r>
+              <a:rPr lang="en-US" sz="1300" b="1" kern="0" spc="200" dirty="0">
                 <a:solidFill>
                   <a:srgbClr val="D4943A"/>
                 </a:solidFill>
@@ -13340,6 +13928,13 @@
             <a:prstDash val="solid"/>
           </a:ln>
         </p:spPr>
+        <p:txBody>
+          <a:bodyPr/>
+          <a:lstStyle/>
+          <a:p>
+            <a:endParaRPr lang="en-US"/>
+          </a:p>
+        </p:txBody>
       </p:sp>
       <p:sp>
         <p:nvSpPr>
@@ -13362,7 +13957,7 @@
           <a:bodyPr wrap="square" rtlCol="0" anchor="ctr"/>
           <a:lstStyle/>
           <a:p>
-            <a:pPr algn="ctr" indent="0" marL="0">
+            <a:pPr marL="0" indent="0" algn="ctr">
               <a:buNone/>
             </a:pPr>
             <a:r>
@@ -13406,6 +14001,13 @@
             <a:prstDash val="solid"/>
           </a:ln>
         </p:spPr>
+        <p:txBody>
+          <a:bodyPr/>
+          <a:lstStyle/>
+          <a:p>
+            <a:endParaRPr lang="en-US"/>
+          </a:p>
+        </p:txBody>
       </p:sp>
       <p:sp>
         <p:nvSpPr>
@@ -13428,7 +14030,7 @@
           <a:bodyPr wrap="square" rtlCol="0" anchor="ctr"/>
           <a:lstStyle/>
           <a:p>
-            <a:pPr algn="ctr" indent="0" marL="0">
+            <a:pPr marL="0" indent="0" algn="ctr">
               <a:buNone/>
             </a:pPr>
             <a:r>
@@ -13467,11 +14069,11 @@
           <a:bodyPr wrap="square" rtlCol="0" anchor="ctr"/>
           <a:lstStyle/>
           <a:p>
-            <a:pPr algn="ctr" indent="0" marL="0">
-              <a:buNone/>
-            </a:pPr>
-            <a:r>
-              <a:rPr lang="en-US" sz="1100" b="1" spc="150" kern="0" dirty="0">
+            <a:pPr marL="0" indent="0" algn="ctr">
+              <a:buNone/>
+            </a:pPr>
+            <a:r>
+              <a:rPr lang="en-US" sz="1100" b="1" kern="0" spc="150" dirty="0">
                 <a:solidFill>
                   <a:srgbClr val="55C8E8"/>
                 </a:solidFill>
@@ -13509,6 +14111,13 @@
             <a:prstDash val="solid"/>
           </a:ln>
         </p:spPr>
+        <p:txBody>
+          <a:bodyPr/>
+          <a:lstStyle/>
+          <a:p>
+            <a:endParaRPr lang="en-US"/>
+          </a:p>
+        </p:txBody>
       </p:sp>
       <p:sp>
         <p:nvSpPr>
@@ -13531,7 +14140,7 @@
           <a:bodyPr wrap="square" rtlCol="0" anchor="t"/>
           <a:lstStyle/>
           <a:p>
-            <a:pPr indent="0" marL="0">
+            <a:pPr marL="0" indent="0">
               <a:buNone/>
             </a:pPr>
             <a:r>
@@ -13575,6 +14184,13 @@
             <a:prstDash val="solid"/>
           </a:ln>
         </p:spPr>
+        <p:txBody>
+          <a:bodyPr/>
+          <a:lstStyle/>
+          <a:p>
+            <a:endParaRPr lang="en-US"/>
+          </a:p>
+        </p:txBody>
       </p:sp>
       <p:sp>
         <p:nvSpPr>
@@ -13597,7 +14213,7 @@
           <a:bodyPr wrap="square" rtlCol="0" anchor="ctr"/>
           <a:lstStyle/>
           <a:p>
-            <a:pPr algn="ctr" indent="0" marL="0">
+            <a:pPr marL="0" indent="0" algn="ctr">
               <a:buNone/>
             </a:pPr>
             <a:r>
@@ -13636,11 +14252,11 @@
           <a:bodyPr wrap="square" rtlCol="0" anchor="ctr"/>
           <a:lstStyle/>
           <a:p>
-            <a:pPr algn="ctr" indent="0" marL="0">
-              <a:buNone/>
-            </a:pPr>
-            <a:r>
-              <a:rPr lang="en-US" sz="1100" b="1" spc="150" kern="0" dirty="0">
+            <a:pPr marL="0" indent="0" algn="ctr">
+              <a:buNone/>
+            </a:pPr>
+            <a:r>
+              <a:rPr lang="en-US" sz="1100" b="1" kern="0" spc="150" dirty="0">
                 <a:solidFill>
                   <a:srgbClr val="D4943A"/>
                 </a:solidFill>
@@ -13678,6 +14294,13 @@
             <a:prstDash val="solid"/>
           </a:ln>
         </p:spPr>
+        <p:txBody>
+          <a:bodyPr/>
+          <a:lstStyle/>
+          <a:p>
+            <a:endParaRPr lang="en-US"/>
+          </a:p>
+        </p:txBody>
       </p:sp>
       <p:sp>
         <p:nvSpPr>
@@ -13700,7 +14323,7 @@
           <a:bodyPr wrap="square" rtlCol="0" anchor="t"/>
           <a:lstStyle/>
           <a:p>
-            <a:pPr indent="0" marL="0">
+            <a:pPr marL="0" indent="0">
               <a:buNone/>
             </a:pPr>
             <a:r>
@@ -13744,6 +14367,13 @@
             <a:prstDash val="solid"/>
           </a:ln>
         </p:spPr>
+        <p:txBody>
+          <a:bodyPr/>
+          <a:lstStyle/>
+          <a:p>
+            <a:endParaRPr lang="en-US"/>
+          </a:p>
+        </p:txBody>
       </p:sp>
       <p:sp>
         <p:nvSpPr>
@@ -13766,7 +14396,7 @@
           <a:bodyPr wrap="square" rtlCol="0" anchor="ctr"/>
           <a:lstStyle/>
           <a:p>
-            <a:pPr algn="ctr" indent="0" marL="0">
+            <a:pPr marL="0" indent="0" algn="ctr">
               <a:buNone/>
             </a:pPr>
             <a:r>
@@ -13805,11 +14435,11 @@
           <a:bodyPr wrap="square" rtlCol="0" anchor="ctr"/>
           <a:lstStyle/>
           <a:p>
-            <a:pPr algn="ctr" indent="0" marL="0">
-              <a:buNone/>
-            </a:pPr>
-            <a:r>
-              <a:rPr lang="en-US" sz="1100" b="1" spc="150" kern="0" dirty="0">
+            <a:pPr marL="0" indent="0" algn="ctr">
+              <a:buNone/>
+            </a:pPr>
+            <a:r>
+              <a:rPr lang="en-US" sz="1100" b="1" kern="0" spc="150" dirty="0">
                 <a:solidFill>
                   <a:srgbClr val="34B76F"/>
                 </a:solidFill>
@@ -13847,6 +14477,13 @@
             <a:prstDash val="solid"/>
           </a:ln>
         </p:spPr>
+        <p:txBody>
+          <a:bodyPr/>
+          <a:lstStyle/>
+          <a:p>
+            <a:endParaRPr lang="en-US"/>
+          </a:p>
+        </p:txBody>
       </p:sp>
       <p:sp>
         <p:nvSpPr>
@@ -13869,7 +14506,7 @@
           <a:bodyPr wrap="square" rtlCol="0" anchor="t"/>
           <a:lstStyle/>
           <a:p>
-            <a:pPr indent="0" marL="0">
+            <a:pPr marL="0" indent="0">
               <a:buNone/>
             </a:pPr>
             <a:r>
@@ -13915,6 +14552,13 @@
             <a:prstDash val="solid"/>
           </a:ln>
         </p:spPr>
+        <p:txBody>
+          <a:bodyPr/>
+          <a:lstStyle/>
+          <a:p>
+            <a:endParaRPr lang="en-US"/>
+          </a:p>
+        </p:txBody>
       </p:sp>
       <p:sp>
         <p:nvSpPr>
@@ -13937,7 +14581,7 @@
           <a:bodyPr wrap="square" rtlCol="0" anchor="ctr"/>
           <a:lstStyle/>
           <a:p>
-            <a:pPr indent="0" marL="0">
+            <a:pPr marL="0" indent="0">
               <a:buNone/>
             </a:pPr>
             <a:r>
@@ -14004,6 +14648,13 @@
             <a:prstDash val="solid"/>
           </a:ln>
         </p:spPr>
+        <p:txBody>
+          <a:bodyPr/>
+          <a:lstStyle/>
+          <a:p>
+            <a:endParaRPr lang="en-US"/>
+          </a:p>
+        </p:txBody>
       </p:sp>
       <p:sp>
         <p:nvSpPr>
@@ -14026,11 +14677,11 @@
           <a:bodyPr wrap="square" rtlCol="0" anchor="ctr"/>
           <a:lstStyle/>
           <a:p>
-            <a:pPr indent="0" marL="0">
-              <a:buNone/>
-            </a:pPr>
-            <a:r>
-              <a:rPr lang="en-US" sz="1000" b="1" spc="150" kern="0" dirty="0">
+            <a:pPr marL="0" indent="0">
+              <a:buNone/>
+            </a:pPr>
+            <a:r>
+              <a:rPr lang="en-US" sz="1000" b="1" kern="0" spc="150" dirty="0">
                 <a:solidFill>
                   <a:srgbClr val="0E1C42"/>
                 </a:solidFill>
@@ -14068,6 +14719,13 @@
             <a:prstDash val="solid"/>
           </a:ln>
         </p:spPr>
+        <p:txBody>
+          <a:bodyPr/>
+          <a:lstStyle/>
+          <a:p>
+            <a:endParaRPr lang="en-US"/>
+          </a:p>
+        </p:txBody>
       </p:sp>
       <p:sp>
         <p:nvSpPr>
@@ -14090,7 +14748,7 @@
           <a:bodyPr wrap="square" rtlCol="0" anchor="ctr"/>
           <a:lstStyle/>
           <a:p>
-            <a:pPr indent="0" marL="0">
+            <a:pPr marL="0" indent="0">
               <a:buNone/>
             </a:pPr>
             <a:r>
@@ -14134,6 +14792,13 @@
             <a:prstDash val="solid"/>
           </a:ln>
         </p:spPr>
+        <p:txBody>
+          <a:bodyPr/>
+          <a:lstStyle/>
+          <a:p>
+            <a:endParaRPr lang="en-US"/>
+          </a:p>
+        </p:txBody>
       </p:sp>
       <p:sp>
         <p:nvSpPr>
@@ -14156,11 +14821,11 @@
           <a:bodyPr wrap="square" rtlCol="0" anchor="ctr"/>
           <a:lstStyle/>
           <a:p>
-            <a:pPr indent="0" marL="0">
-              <a:buNone/>
-            </a:pPr>
-            <a:r>
-              <a:rPr lang="en-US" sz="1000" b="1" spc="100" kern="0" dirty="0">
+            <a:pPr marL="0" indent="0">
+              <a:buNone/>
+            </a:pPr>
+            <a:r>
+              <a:rPr lang="en-US" sz="1000" b="1" kern="0" spc="100" dirty="0">
                 <a:solidFill>
                   <a:srgbClr val="55C8E8"/>
                 </a:solidFill>
@@ -14195,7 +14860,7 @@
           <a:bodyPr wrap="square" rtlCol="0" anchor="t"/>
           <a:lstStyle/>
           <a:p>
-            <a:pPr indent="0" marL="0">
+            <a:pPr marL="0" indent="0">
               <a:buNone/>
             </a:pPr>
             <a:r>
@@ -14239,6 +14904,13 @@
             <a:prstDash val="solid"/>
           </a:ln>
         </p:spPr>
+        <p:txBody>
+          <a:bodyPr/>
+          <a:lstStyle/>
+          <a:p>
+            <a:endParaRPr lang="en-US"/>
+          </a:p>
+        </p:txBody>
       </p:sp>
       <p:sp>
         <p:nvSpPr>
@@ -14261,11 +14933,11 @@
           <a:bodyPr wrap="square" rtlCol="0" anchor="ctr"/>
           <a:lstStyle/>
           <a:p>
-            <a:pPr indent="0" marL="0">
-              <a:buNone/>
-            </a:pPr>
-            <a:r>
-              <a:rPr lang="en-US" sz="800" b="1" spc="100" kern="0" dirty="0">
+            <a:pPr marL="0" indent="0">
+              <a:buNone/>
+            </a:pPr>
+            <a:r>
+              <a:rPr lang="en-US" sz="800" b="1" kern="0" spc="100" dirty="0">
                 <a:solidFill>
                   <a:srgbClr val="55C8E8"/>
                 </a:solidFill>
@@ -14300,7 +14972,7 @@
           <a:bodyPr wrap="square" rtlCol="0" anchor="t"/>
           <a:lstStyle/>
           <a:p>
-            <a:pPr indent="0" marL="0">
+            <a:pPr marL="0" indent="0">
               <a:buNone/>
             </a:pPr>
             <a:r>
@@ -14344,6 +15016,13 @@
             <a:prstDash val="solid"/>
           </a:ln>
         </p:spPr>
+        <p:txBody>
+          <a:bodyPr/>
+          <a:lstStyle/>
+          <a:p>
+            <a:endParaRPr lang="en-US"/>
+          </a:p>
+        </p:txBody>
       </p:sp>
       <p:sp>
         <p:nvSpPr>
@@ -14366,11 +15045,11 @@
           <a:bodyPr wrap="square" rtlCol="0" anchor="ctr"/>
           <a:lstStyle/>
           <a:p>
-            <a:pPr indent="0" marL="0">
-              <a:buNone/>
-            </a:pPr>
-            <a:r>
-              <a:rPr lang="en-US" sz="1000" b="1" spc="100" kern="0" dirty="0">
+            <a:pPr marL="0" indent="0">
+              <a:buNone/>
+            </a:pPr>
+            <a:r>
+              <a:rPr lang="en-US" sz="1000" b="1" kern="0" spc="100" dirty="0">
                 <a:solidFill>
                   <a:srgbClr val="D4943A"/>
                 </a:solidFill>
@@ -14405,7 +15084,7 @@
           <a:bodyPr wrap="square" rtlCol="0" anchor="t"/>
           <a:lstStyle/>
           <a:p>
-            <a:pPr indent="0" marL="0">
+            <a:pPr marL="0" indent="0">
               <a:buNone/>
             </a:pPr>
             <a:r>
@@ -14449,6 +15128,13 @@
             <a:prstDash val="solid"/>
           </a:ln>
         </p:spPr>
+        <p:txBody>
+          <a:bodyPr/>
+          <a:lstStyle/>
+          <a:p>
+            <a:endParaRPr lang="en-US"/>
+          </a:p>
+        </p:txBody>
       </p:sp>
       <p:sp>
         <p:nvSpPr>
@@ -14471,11 +15157,11 @@
           <a:bodyPr wrap="square" rtlCol="0" anchor="ctr"/>
           <a:lstStyle/>
           <a:p>
-            <a:pPr indent="0" marL="0">
-              <a:buNone/>
-            </a:pPr>
-            <a:r>
-              <a:rPr lang="en-US" sz="800" b="1" spc="100" kern="0" dirty="0">
+            <a:pPr marL="0" indent="0">
+              <a:buNone/>
+            </a:pPr>
+            <a:r>
+              <a:rPr lang="en-US" sz="800" b="1" kern="0" spc="100" dirty="0">
                 <a:solidFill>
                   <a:srgbClr val="D4943A"/>
                 </a:solidFill>
@@ -14510,7 +15196,7 @@
           <a:bodyPr wrap="square" rtlCol="0" anchor="t"/>
           <a:lstStyle/>
           <a:p>
-            <a:pPr indent="0" marL="0">
+            <a:pPr marL="0" indent="0">
               <a:buNone/>
             </a:pPr>
             <a:r>
@@ -14554,6 +15240,13 @@
             <a:prstDash val="solid"/>
           </a:ln>
         </p:spPr>
+        <p:txBody>
+          <a:bodyPr/>
+          <a:lstStyle/>
+          <a:p>
+            <a:endParaRPr lang="en-US"/>
+          </a:p>
+        </p:txBody>
       </p:sp>
       <p:sp>
         <p:nvSpPr>
@@ -14576,11 +15269,11 @@
           <a:bodyPr wrap="square" rtlCol="0" anchor="ctr"/>
           <a:lstStyle/>
           <a:p>
-            <a:pPr indent="0" marL="0">
-              <a:buNone/>
-            </a:pPr>
-            <a:r>
-              <a:rPr lang="en-US" sz="1000" b="1" spc="100" kern="0" dirty="0">
+            <a:pPr marL="0" indent="0">
+              <a:buNone/>
+            </a:pPr>
+            <a:r>
+              <a:rPr lang="en-US" sz="1000" b="1" kern="0" spc="100" dirty="0">
                 <a:solidFill>
                   <a:srgbClr val="34B76F"/>
                 </a:solidFill>
@@ -14615,7 +15308,7 @@
           <a:bodyPr wrap="square" rtlCol="0" anchor="t"/>
           <a:lstStyle/>
           <a:p>
-            <a:pPr indent="0" marL="0">
+            <a:pPr marL="0" indent="0">
               <a:buNone/>
             </a:pPr>
             <a:r>
@@ -14659,6 +15352,13 @@
             <a:prstDash val="solid"/>
           </a:ln>
         </p:spPr>
+        <p:txBody>
+          <a:bodyPr/>
+          <a:lstStyle/>
+          <a:p>
+            <a:endParaRPr lang="en-US"/>
+          </a:p>
+        </p:txBody>
       </p:sp>
       <p:sp>
         <p:nvSpPr>
@@ -14681,11 +15381,11 @@
           <a:bodyPr wrap="square" rtlCol="0" anchor="ctr"/>
           <a:lstStyle/>
           <a:p>
-            <a:pPr indent="0" marL="0">
-              <a:buNone/>
-            </a:pPr>
-            <a:r>
-              <a:rPr lang="en-US" sz="800" b="1" spc="100" kern="0" dirty="0">
+            <a:pPr marL="0" indent="0">
+              <a:buNone/>
+            </a:pPr>
+            <a:r>
+              <a:rPr lang="en-US" sz="800" b="1" kern="0" spc="100" dirty="0">
                 <a:solidFill>
                   <a:srgbClr val="34B76F"/>
                 </a:solidFill>
@@ -14720,7 +15420,7 @@
           <a:bodyPr wrap="square" rtlCol="0" anchor="t"/>
           <a:lstStyle/>
           <a:p>
-            <a:pPr indent="0" marL="0">
+            <a:pPr marL="0" indent="0">
               <a:buNone/>
             </a:pPr>
             <a:r>
@@ -14787,6 +15487,13 @@
             <a:prstDash val="solid"/>
           </a:ln>
         </p:spPr>
+        <p:txBody>
+          <a:bodyPr/>
+          <a:lstStyle/>
+          <a:p>
+            <a:endParaRPr lang="en-US"/>
+          </a:p>
+        </p:txBody>
       </p:sp>
       <p:sp>
         <p:nvSpPr>
@@ -14809,11 +15516,11 @@
           <a:bodyPr wrap="square" rtlCol="0" anchor="ctr"/>
           <a:lstStyle/>
           <a:p>
-            <a:pPr indent="0" marL="0">
-              <a:buNone/>
-            </a:pPr>
-            <a:r>
-              <a:rPr lang="en-US" sz="1000" b="1" spc="150" kern="0" dirty="0">
+            <a:pPr marL="0" indent="0">
+              <a:buNone/>
+            </a:pPr>
+            <a:r>
+              <a:rPr lang="en-US" sz="1000" b="1" kern="0" spc="150" dirty="0">
                 <a:solidFill>
                   <a:srgbClr val="1A8A7D"/>
                 </a:solidFill>
@@ -14851,6 +15558,13 @@
             <a:prstDash val="solid"/>
           </a:ln>
         </p:spPr>
+        <p:txBody>
+          <a:bodyPr/>
+          <a:lstStyle/>
+          <a:p>
+            <a:endParaRPr lang="en-US"/>
+          </a:p>
+        </p:txBody>
       </p:sp>
       <p:sp>
         <p:nvSpPr>
@@ -14873,7 +15587,7 @@
           <a:bodyPr wrap="square" rtlCol="0" anchor="ctr"/>
           <a:lstStyle/>
           <a:p>
-            <a:pPr indent="0" marL="0">
+            <a:pPr marL="0" indent="0">
               <a:buNone/>
             </a:pPr>
             <a:r>
@@ -14917,6 +15631,13 @@
             <a:prstDash val="dash"/>
           </a:ln>
         </p:spPr>
+        <p:txBody>
+          <a:bodyPr/>
+          <a:lstStyle/>
+          <a:p>
+            <a:endParaRPr lang="en-US"/>
+          </a:p>
+        </p:txBody>
       </p:sp>
       <p:sp>
         <p:nvSpPr>
@@ -14939,11 +15660,11 @@
           <a:bodyPr wrap="square" lIns="0" tIns="0" rIns="0" bIns="0" rtlCol="0" anchor="ctr"/>
           <a:lstStyle/>
           <a:p>
-            <a:pPr algn="ctr" indent="0" marL="0">
-              <a:buNone/>
-            </a:pPr>
-            <a:r>
-              <a:rPr lang="en-US" sz="900" b="1" spc="150" kern="0" dirty="0">
+            <a:pPr marL="0" indent="0" algn="ctr">
+              <a:buNone/>
+            </a:pPr>
+            <a:r>
+              <a:rPr lang="en-US" sz="900" b="1" kern="0" spc="150" dirty="0">
                 <a:solidFill>
                   <a:srgbClr val="7A88A8"/>
                 </a:solidFill>
@@ -14978,7 +15699,7 @@
           <a:bodyPr wrap="square" rtlCol="0" anchor="ctr"/>
           <a:lstStyle/>
           <a:p>
-            <a:pPr algn="ctr" indent="0" marL="0">
+            <a:pPr marL="0" indent="0" algn="ctr">
               <a:buNone/>
             </a:pPr>
             <a:r>
@@ -15022,6 +15743,13 @@
             <a:prstDash val="solid"/>
           </a:ln>
         </p:spPr>
+        <p:txBody>
+          <a:bodyPr/>
+          <a:lstStyle/>
+          <a:p>
+            <a:endParaRPr lang="en-US"/>
+          </a:p>
+        </p:txBody>
       </p:sp>
       <p:sp>
         <p:nvSpPr>
@@ -15044,11 +15772,11 @@
           <a:bodyPr wrap="square" rtlCol="0" anchor="ctr"/>
           <a:lstStyle/>
           <a:p>
-            <a:pPr indent="0" marL="0">
-              <a:buNone/>
-            </a:pPr>
-            <a:r>
-              <a:rPr lang="en-US" sz="900" b="1" spc="150" kern="0" dirty="0">
+            <a:pPr marL="0" indent="0">
+              <a:buNone/>
+            </a:pPr>
+            <a:r>
+              <a:rPr lang="en-US" sz="900" b="1" kern="0" spc="150" dirty="0">
                 <a:solidFill>
                   <a:srgbClr val="1A8A7D"/>
                 </a:solidFill>
@@ -15088,6 +15816,13 @@
             <a:prstDash val="solid"/>
           </a:ln>
         </p:spPr>
+        <p:txBody>
+          <a:bodyPr/>
+          <a:lstStyle/>
+          <a:p>
+            <a:endParaRPr lang="en-US"/>
+          </a:p>
+        </p:txBody>
       </p:sp>
       <p:sp>
         <p:nvSpPr>
@@ -15110,7 +15845,7 @@
           <a:bodyPr wrap="square" rtlCol="0" anchor="ctr"/>
           <a:lstStyle/>
           <a:p>
-            <a:pPr indent="0" marL="0">
+            <a:pPr marL="0" indent="0">
               <a:buNone/>
             </a:pPr>
             <a:r>
@@ -15154,6 +15889,13 @@
             <a:prstDash val="solid"/>
           </a:ln>
         </p:spPr>
+        <p:txBody>
+          <a:bodyPr/>
+          <a:lstStyle/>
+          <a:p>
+            <a:endParaRPr lang="en-US"/>
+          </a:p>
+        </p:txBody>
       </p:sp>
       <p:sp>
         <p:nvSpPr>
@@ -15176,7 +15918,7 @@
           <a:bodyPr wrap="square" rtlCol="0" anchor="ctr"/>
           <a:lstStyle/>
           <a:p>
-            <a:pPr indent="0" marL="0">
+            <a:pPr marL="0" indent="0">
               <a:buNone/>
             </a:pPr>
             <a:r>
@@ -15220,6 +15962,13 @@
             <a:prstDash val="solid"/>
           </a:ln>
         </p:spPr>
+        <p:txBody>
+          <a:bodyPr/>
+          <a:lstStyle/>
+          <a:p>
+            <a:endParaRPr lang="en-US"/>
+          </a:p>
+        </p:txBody>
       </p:sp>
       <p:sp>
         <p:nvSpPr>
@@ -15242,7 +15991,7 @@
           <a:bodyPr wrap="square" rtlCol="0" anchor="ctr"/>
           <a:lstStyle/>
           <a:p>
-            <a:pPr indent="0" marL="0">
+            <a:pPr marL="0" indent="0">
               <a:buNone/>
             </a:pPr>
             <a:r>
@@ -15286,6 +16035,13 @@
             <a:prstDash val="solid"/>
           </a:ln>
         </p:spPr>
+        <p:txBody>
+          <a:bodyPr/>
+          <a:lstStyle/>
+          <a:p>
+            <a:endParaRPr lang="en-US"/>
+          </a:p>
+        </p:txBody>
       </p:sp>
       <p:sp>
         <p:nvSpPr>
@@ -15308,7 +16064,7 @@
           <a:bodyPr wrap="square" rtlCol="0" anchor="ctr"/>
           <a:lstStyle/>
           <a:p>
-            <a:pPr indent="0" marL="0">
+            <a:pPr marL="0" indent="0">
               <a:buNone/>
             </a:pPr>
             <a:r>
@@ -15352,6 +16108,13 @@
             <a:prstDash val="solid"/>
           </a:ln>
         </p:spPr>
+        <p:txBody>
+          <a:bodyPr/>
+          <a:lstStyle/>
+          <a:p>
+            <a:endParaRPr lang="en-US"/>
+          </a:p>
+        </p:txBody>
       </p:sp>
       <p:sp>
         <p:nvSpPr>
@@ -15374,7 +16137,7 @@
           <a:bodyPr wrap="square" rtlCol="0" anchor="ctr"/>
           <a:lstStyle/>
           <a:p>
-            <a:pPr algn="ctr" indent="0" marL="0">
+            <a:pPr marL="0" indent="0" algn="ctr">
               <a:buNone/>
             </a:pPr>
             <a:r>
@@ -15441,6 +16204,13 @@
             <a:prstDash val="solid"/>
           </a:ln>
         </p:spPr>
+        <p:txBody>
+          <a:bodyPr/>
+          <a:lstStyle/>
+          <a:p>
+            <a:endParaRPr lang="en-US"/>
+          </a:p>
+        </p:txBody>
       </p:sp>
       <p:sp>
         <p:nvSpPr>
@@ -15463,11 +16233,11 @@
           <a:bodyPr wrap="square" rtlCol="0" anchor="ctr"/>
           <a:lstStyle/>
           <a:p>
-            <a:pPr indent="0" marL="0">
-              <a:buNone/>
-            </a:pPr>
-            <a:r>
-              <a:rPr lang="en-US" sz="1000" b="1" spc="150" kern="0" dirty="0">
+            <a:pPr marL="0" indent="0">
+              <a:buNone/>
+            </a:pPr>
+            <a:r>
+              <a:rPr lang="en-US" sz="1000" b="1" kern="0" spc="150" dirty="0">
                 <a:solidFill>
                   <a:srgbClr val="0E1C42"/>
                 </a:solidFill>
@@ -15505,6 +16275,13 @@
             <a:prstDash val="solid"/>
           </a:ln>
         </p:spPr>
+        <p:txBody>
+          <a:bodyPr/>
+          <a:lstStyle/>
+          <a:p>
+            <a:endParaRPr lang="en-US"/>
+          </a:p>
+        </p:txBody>
       </p:sp>
       <p:sp>
         <p:nvSpPr>
@@ -15532,6 +16309,13 @@
             <a:prstDash val="solid"/>
           </a:ln>
         </p:spPr>
+        <p:txBody>
+          <a:bodyPr/>
+          <a:lstStyle/>
+          <a:p>
+            <a:endParaRPr lang="en-US"/>
+          </a:p>
+        </p:txBody>
       </p:sp>
       <p:sp>
         <p:nvSpPr>
@@ -15554,11 +16338,11 @@
           <a:bodyPr wrap="square" lIns="0" tIns="0" rIns="0" bIns="0" rtlCol="0" anchor="ctr"/>
           <a:lstStyle/>
           <a:p>
-            <a:pPr indent="0" marL="0">
-              <a:buNone/>
-            </a:pPr>
-            <a:r>
-              <a:rPr lang="en-US" sz="900" b="1" spc="150" kern="0" dirty="0">
+            <a:pPr marL="0" indent="0">
+              <a:buNone/>
+            </a:pPr>
+            <a:r>
+              <a:rPr lang="en-US" sz="900" b="1" kern="0" spc="150" dirty="0">
                 <a:solidFill>
                   <a:srgbClr val="55C8E8"/>
                 </a:solidFill>
@@ -15593,7 +16377,7 @@
           <a:bodyPr wrap="square" lIns="0" tIns="0" rIns="0" bIns="0" rtlCol="0" anchor="t"/>
           <a:lstStyle/>
           <a:p>
-            <a:pPr indent="0" marL="0">
+            <a:pPr marL="0" indent="0">
               <a:spcAft>
                 <a:spcPts val="500"/>
               </a:spcAft>
@@ -15613,7 +16397,7 @@
             <a:endParaRPr lang="en-US" sz="1100" dirty="0"/>
           </a:p>
           <a:p>
-            <a:pPr indent="0" marL="0">
+            <a:pPr marL="0" indent="0">
               <a:spcAft>
                 <a:spcPts val="500"/>
               </a:spcAft>
@@ -15633,7 +16417,7 @@
             <a:endParaRPr lang="en-US" sz="1100" dirty="0"/>
           </a:p>
           <a:p>
-            <a:pPr indent="0" marL="0">
+            <a:pPr marL="0" indent="0">
               <a:spcAft>
                 <a:spcPts val="500"/>
               </a:spcAft>
@@ -15653,7 +16437,7 @@
             <a:endParaRPr lang="en-US" sz="1100" dirty="0"/>
           </a:p>
           <a:p>
-            <a:pPr indent="0" marL="0">
+            <a:pPr marL="0" indent="0">
               <a:spcAft>
                 <a:spcPts val="500"/>
               </a:spcAft>
@@ -15673,7 +16457,7 @@
             <a:endParaRPr lang="en-US" sz="1100" dirty="0"/>
           </a:p>
           <a:p>
-            <a:pPr indent="0" marL="0">
+            <a:pPr marL="0" indent="0">
               <a:spcAft>
                 <a:spcPts val="500"/>
               </a:spcAft>
@@ -15720,6 +16504,13 @@
             <a:prstDash val="solid"/>
           </a:ln>
         </p:spPr>
+        <p:txBody>
+          <a:bodyPr/>
+          <a:lstStyle/>
+          <a:p>
+            <a:endParaRPr lang="en-US"/>
+          </a:p>
+        </p:txBody>
       </p:sp>
       <p:sp>
         <p:nvSpPr>
@@ -15742,11 +16533,11 @@
           <a:bodyPr wrap="square" lIns="0" tIns="0" rIns="0" bIns="0" rtlCol="0" anchor="ctr"/>
           <a:lstStyle/>
           <a:p>
-            <a:pPr indent="0" marL="0">
-              <a:buNone/>
-            </a:pPr>
-            <a:r>
-              <a:rPr lang="en-US" sz="900" b="1" spc="150" kern="0" dirty="0">
+            <a:pPr marL="0" indent="0">
+              <a:buNone/>
+            </a:pPr>
+            <a:r>
+              <a:rPr lang="en-US" sz="900" b="1" kern="0" spc="150" dirty="0">
                 <a:solidFill>
                   <a:srgbClr val="D4943A"/>
                 </a:solidFill>
@@ -15781,7 +16572,7 @@
           <a:bodyPr wrap="square" lIns="0" tIns="0" rIns="0" bIns="0" rtlCol="0" anchor="t"/>
           <a:lstStyle/>
           <a:p>
-            <a:pPr indent="0" marL="0">
+            <a:pPr marL="0" indent="0">
               <a:spcAft>
                 <a:spcPts val="500"/>
               </a:spcAft>
@@ -15801,7 +16592,7 @@
             <a:endParaRPr lang="en-US" sz="1200" dirty="0"/>
           </a:p>
           <a:p>
-            <a:pPr indent="0" marL="0">
+            <a:pPr marL="0" indent="0">
               <a:spcAft>
                 <a:spcPts val="500"/>
               </a:spcAft>
@@ -15848,6 +16639,13 @@
             <a:prstDash val="solid"/>
           </a:ln>
         </p:spPr>
+        <p:txBody>
+          <a:bodyPr/>
+          <a:lstStyle/>
+          <a:p>
+            <a:endParaRPr lang="en-US"/>
+          </a:p>
+        </p:txBody>
       </p:sp>
       <p:sp>
         <p:nvSpPr>
@@ -15870,11 +16668,11 @@
           <a:bodyPr wrap="square" rtlCol="0" anchor="ctr"/>
           <a:lstStyle/>
           <a:p>
-            <a:pPr indent="0" marL="0">
-              <a:buNone/>
-            </a:pPr>
-            <a:r>
-              <a:rPr lang="en-US" sz="900" b="1" spc="150" kern="0" dirty="0">
+            <a:pPr marL="0" indent="0">
+              <a:buNone/>
+            </a:pPr>
+            <a:r>
+              <a:rPr lang="en-US" sz="900" b="1" kern="0" spc="150" dirty="0">
                 <a:solidFill>
                   <a:srgbClr val="D4943A"/>
                 </a:solidFill>
@@ -15914,6 +16712,13 @@
             <a:prstDash val="solid"/>
           </a:ln>
         </p:spPr>
+        <p:txBody>
+          <a:bodyPr/>
+          <a:lstStyle/>
+          <a:p>
+            <a:endParaRPr lang="en-US"/>
+          </a:p>
+        </p:txBody>
       </p:sp>
       <p:sp>
         <p:nvSpPr>
@@ -15936,7 +16741,7 @@
           <a:bodyPr wrap="square" rtlCol="0" anchor="ctr"/>
           <a:lstStyle/>
           <a:p>
-            <a:pPr indent="0" marL="0">
+            <a:pPr marL="0" indent="0">
               <a:buNone/>
             </a:pPr>
             <a:r>
@@ -15975,7 +16780,7 @@
           <a:bodyPr wrap="square" rtlCol="0" anchor="ctr"/>
           <a:lstStyle/>
           <a:p>
-            <a:pPr indent="0" marL="0">
+            <a:pPr marL="0" indent="0">
               <a:buNone/>
             </a:pPr>
             <a:r>
@@ -16019,6 +16824,13 @@
             <a:prstDash val="solid"/>
           </a:ln>
         </p:spPr>
+        <p:txBody>
+          <a:bodyPr/>
+          <a:lstStyle/>
+          <a:p>
+            <a:endParaRPr lang="en-US"/>
+          </a:p>
+        </p:txBody>
       </p:sp>
       <p:sp>
         <p:nvSpPr>
@@ -16041,7 +16853,7 @@
           <a:bodyPr wrap="square" rtlCol="0" anchor="ctr"/>
           <a:lstStyle/>
           <a:p>
-            <a:pPr indent="0" marL="0">
+            <a:pPr marL="0" indent="0">
               <a:buNone/>
             </a:pPr>
             <a:r>
@@ -16080,7 +16892,7 @@
           <a:bodyPr wrap="square" rtlCol="0" anchor="ctr"/>
           <a:lstStyle/>
           <a:p>
-            <a:pPr indent="0" marL="0">
+            <a:pPr marL="0" indent="0">
               <a:buNone/>
             </a:pPr>
             <a:r>
@@ -16124,6 +16936,13 @@
             <a:prstDash val="solid"/>
           </a:ln>
         </p:spPr>
+        <p:txBody>
+          <a:bodyPr/>
+          <a:lstStyle/>
+          <a:p>
+            <a:endParaRPr lang="en-US"/>
+          </a:p>
+        </p:txBody>
       </p:sp>
       <p:sp>
         <p:nvSpPr>
@@ -16146,7 +16965,7 @@
           <a:bodyPr wrap="square" rtlCol="0" anchor="ctr"/>
           <a:lstStyle/>
           <a:p>
-            <a:pPr indent="0" marL="0">
+            <a:pPr marL="0" indent="0">
               <a:buNone/>
             </a:pPr>
             <a:r>
@@ -16185,7 +17004,7 @@
           <a:bodyPr wrap="square" rtlCol="0" anchor="ctr"/>
           <a:lstStyle/>
           <a:p>
-            <a:pPr indent="0" marL="0">
+            <a:pPr marL="0" indent="0">
               <a:buNone/>
             </a:pPr>
             <a:r>
@@ -16504,4 +17323,319 @@
     </a:ext>
   </a:extLst>
 </a:theme>
+</file>
+
+<file path=ppt/theme/theme2.xml><?xml version="1.0" encoding="utf-8"?>
+<a:theme xmlns:a="http://schemas.openxmlformats.org/drawingml/2006/main" name="Office Theme">
+  <a:themeElements>
+    <a:clrScheme name="Office">
+      <a:dk1>
+        <a:sysClr val="windowText" lastClr="000000"/>
+      </a:dk1>
+      <a:lt1>
+        <a:sysClr val="window" lastClr="FFFFFF"/>
+      </a:lt1>
+      <a:dk2>
+        <a:srgbClr val="0E2841"/>
+      </a:dk2>
+      <a:lt2>
+        <a:srgbClr val="E8E8E8"/>
+      </a:lt2>
+      <a:accent1>
+        <a:srgbClr val="156082"/>
+      </a:accent1>
+      <a:accent2>
+        <a:srgbClr val="E97132"/>
+      </a:accent2>
+      <a:accent3>
+        <a:srgbClr val="196B24"/>
+      </a:accent3>
+      <a:accent4>
+        <a:srgbClr val="0F9ED5"/>
+      </a:accent4>
+      <a:accent5>
+        <a:srgbClr val="A02B93"/>
+      </a:accent5>
+      <a:accent6>
+        <a:srgbClr val="4EA72E"/>
+      </a:accent6>
+      <a:hlink>
+        <a:srgbClr val="467886"/>
+      </a:hlink>
+      <a:folHlink>
+        <a:srgbClr val="96607D"/>
+      </a:folHlink>
+    </a:clrScheme>
+    <a:fontScheme name="Office">
+      <a:majorFont>
+        <a:latin typeface="Aptos Display" panose="02110004020202020204"/>
+        <a:ea typeface=""/>
+        <a:cs typeface=""/>
+        <a:font script="Jpan" typeface="游ゴシック Light"/>
+        <a:font script="Hang" typeface="맑은 고딕"/>
+        <a:font script="Hans" typeface="等线 Light"/>
+        <a:font script="Hant" typeface="新細明體"/>
+        <a:font script="Arab" typeface="Times New Roman"/>
+        <a:font script="Hebr" typeface="Times New Roman"/>
+        <a:font script="Thai" typeface="Angsana New"/>
+        <a:font script="Ethi" typeface="Nyala"/>
+        <a:font script="Beng" typeface="Vrinda"/>
+        <a:font script="Gujr" typeface="Shruti"/>
+        <a:font script="Khmr" typeface="MoolBoran"/>
+        <a:font script="Knda" typeface="Tunga"/>
+        <a:font script="Guru" typeface="Raavi"/>
+        <a:font script="Cans" typeface="Euphemia"/>
+        <a:font script="Cher" typeface="Plantagenet Cherokee"/>
+        <a:font script="Yiii" typeface="Microsoft Yi Baiti"/>
+        <a:font script="Tibt" typeface="Microsoft Himalaya"/>
+        <a:font script="Thaa" typeface="MV Boli"/>
+        <a:font script="Deva" typeface="Mangal"/>
+        <a:font script="Telu" typeface="Gautami"/>
+        <a:font script="Taml" typeface="Latha"/>
+        <a:font script="Syrc" typeface="Estrangelo Edessa"/>
+        <a:font script="Orya" typeface="Kalinga"/>
+        <a:font script="Mlym" typeface="Kartika"/>
+        <a:font script="Laoo" typeface="DokChampa"/>
+        <a:font script="Sinh" typeface="Iskoola Pota"/>
+        <a:font script="Mong" typeface="Mongolian Baiti"/>
+        <a:font script="Viet" typeface="Times New Roman"/>
+        <a:font script="Uigh" typeface="Microsoft Uighur"/>
+        <a:font script="Geor" typeface="Sylfaen"/>
+        <a:font script="Armn" typeface="Arial"/>
+        <a:font script="Bugi" typeface="Leelawadee UI"/>
+        <a:font script="Bopo" typeface="Microsoft JhengHei"/>
+        <a:font script="Java" typeface="Javanese Text"/>
+        <a:font script="Lisu" typeface="Segoe UI"/>
+        <a:font script="Mymr" typeface="Myanmar Text"/>
+        <a:font script="Nkoo" typeface="Ebrima"/>
+        <a:font script="Olck" typeface="Nirmala UI"/>
+        <a:font script="Osma" typeface="Ebrima"/>
+        <a:font script="Phag" typeface="Phagspa"/>
+        <a:font script="Syrn" typeface="Estrangelo Edessa"/>
+        <a:font script="Syrj" typeface="Estrangelo Edessa"/>
+        <a:font script="Syre" typeface="Estrangelo Edessa"/>
+        <a:font script="Sora" typeface="Nirmala UI"/>
+        <a:font script="Tale" typeface="Microsoft Tai Le"/>
+        <a:font script="Talu" typeface="Microsoft New Tai Lue"/>
+        <a:font script="Tfng" typeface="Ebrima"/>
+      </a:majorFont>
+      <a:minorFont>
+        <a:latin typeface="Aptos" panose="02110004020202020204"/>
+        <a:ea typeface=""/>
+        <a:cs typeface=""/>
+        <a:font script="Jpan" typeface="游ゴシック"/>
+        <a:font script="Hang" typeface="맑은 고딕"/>
+        <a:font script="Hans" typeface="等线"/>
+        <a:font script="Hant" typeface="新細明體"/>
+        <a:font script="Arab" typeface="Arial"/>
+        <a:font script="Hebr" typeface="Arial"/>
+        <a:font script="Thai" typeface="Cordia New"/>
+        <a:font script="Ethi" typeface="Nyala"/>
+        <a:font script="Beng" typeface="Vrinda"/>
+        <a:font script="Gujr" typeface="Shruti"/>
+        <a:font script="Khmr" typeface="DaunPenh"/>
+        <a:font script="Knda" typeface="Tunga"/>
+        <a:font script="Guru" typeface="Raavi"/>
+        <a:font script="Cans" typeface="Euphemia"/>
+        <a:font script="Cher" typeface="Plantagenet Cherokee"/>
+        <a:font script="Yiii" typeface="Microsoft Yi Baiti"/>
+        <a:font script="Tibt" typeface="Microsoft Himalaya"/>
+        <a:font script="Thaa" typeface="MV Boli"/>
+        <a:font script="Deva" typeface="Mangal"/>
+        <a:font script="Telu" typeface="Gautami"/>
+        <a:font script="Taml" typeface="Latha"/>
+        <a:font script="Syrc" typeface="Estrangelo Edessa"/>
+        <a:font script="Orya" typeface="Kalinga"/>
+        <a:font script="Mlym" typeface="Kartika"/>
+        <a:font script="Laoo" typeface="DokChampa"/>
+        <a:font script="Sinh" typeface="Iskoola Pota"/>
+        <a:font script="Mong" typeface="Mongolian Baiti"/>
+        <a:font script="Viet" typeface="Arial"/>
+        <a:font script="Uigh" typeface="Microsoft Uighur"/>
+        <a:font script="Geor" typeface="Sylfaen"/>
+        <a:font script="Armn" typeface="Arial"/>
+        <a:font script="Bugi" typeface="Leelawadee UI"/>
+        <a:font script="Bopo" typeface="Microsoft JhengHei"/>
+        <a:font script="Java" typeface="Javanese Text"/>
+        <a:font script="Lisu" typeface="Segoe UI"/>
+        <a:font script="Mymr" typeface="Myanmar Text"/>
+        <a:font script="Nkoo" typeface="Ebrima"/>
+        <a:font script="Olck" typeface="Nirmala UI"/>
+        <a:font script="Osma" typeface="Ebrima"/>
+        <a:font script="Phag" typeface="Phagspa"/>
+        <a:font script="Syrn" typeface="Estrangelo Edessa"/>
+        <a:font script="Syrj" typeface="Estrangelo Edessa"/>
+        <a:font script="Syre" typeface="Estrangelo Edessa"/>
+        <a:font script="Sora" typeface="Nirmala UI"/>
+        <a:font script="Tale" typeface="Microsoft Tai Le"/>
+        <a:font script="Talu" typeface="Microsoft New Tai Lue"/>
+        <a:font script="Tfng" typeface="Ebrima"/>
+      </a:minorFont>
+    </a:fontScheme>
+    <a:fmtScheme name="Office">
+      <a:fillStyleLst>
+        <a:solidFill>
+          <a:schemeClr val="phClr"/>
+        </a:solidFill>
+        <a:gradFill rotWithShape="1">
+          <a:gsLst>
+            <a:gs pos="0">
+              <a:schemeClr val="phClr">
+                <a:lumMod val="110000"/>
+                <a:satMod val="105000"/>
+                <a:tint val="67000"/>
+              </a:schemeClr>
+            </a:gs>
+            <a:gs pos="50000">
+              <a:schemeClr val="phClr">
+                <a:lumMod val="105000"/>
+                <a:satMod val="103000"/>
+                <a:tint val="73000"/>
+              </a:schemeClr>
+            </a:gs>
+            <a:gs pos="100000">
+              <a:schemeClr val="phClr">
+                <a:lumMod val="105000"/>
+                <a:satMod val="109000"/>
+                <a:tint val="81000"/>
+              </a:schemeClr>
+            </a:gs>
+          </a:gsLst>
+          <a:lin ang="5400000" scaled="0"/>
+        </a:gradFill>
+        <a:gradFill rotWithShape="1">
+          <a:gsLst>
+            <a:gs pos="0">
+              <a:schemeClr val="phClr">
+                <a:satMod val="103000"/>
+                <a:lumMod val="102000"/>
+                <a:tint val="94000"/>
+              </a:schemeClr>
+            </a:gs>
+            <a:gs pos="50000">
+              <a:schemeClr val="phClr">
+                <a:satMod val="110000"/>
+                <a:lumMod val="100000"/>
+                <a:shade val="100000"/>
+              </a:schemeClr>
+            </a:gs>
+            <a:gs pos="100000">
+              <a:schemeClr val="phClr">
+                <a:lumMod val="99000"/>
+                <a:satMod val="120000"/>
+                <a:shade val="78000"/>
+              </a:schemeClr>
+            </a:gs>
+          </a:gsLst>
+          <a:lin ang="5400000" scaled="0"/>
+        </a:gradFill>
+      </a:fillStyleLst>
+      <a:lnStyleLst>
+        <a:ln w="12700" cap="flat" cmpd="sng" algn="ctr">
+          <a:solidFill>
+            <a:schemeClr val="phClr"/>
+          </a:solidFill>
+          <a:prstDash val="solid"/>
+          <a:miter lim="800000"/>
+        </a:ln>
+        <a:ln w="19050" cap="flat" cmpd="sng" algn="ctr">
+          <a:solidFill>
+            <a:schemeClr val="phClr"/>
+          </a:solidFill>
+          <a:prstDash val="solid"/>
+          <a:miter lim="800000"/>
+        </a:ln>
+        <a:ln w="25400" cap="flat" cmpd="sng" algn="ctr">
+          <a:solidFill>
+            <a:schemeClr val="phClr"/>
+          </a:solidFill>
+          <a:prstDash val="solid"/>
+          <a:miter lim="800000"/>
+        </a:ln>
+      </a:lnStyleLst>
+      <a:effectStyleLst>
+        <a:effectStyle>
+          <a:effectLst/>
+        </a:effectStyle>
+        <a:effectStyle>
+          <a:effectLst/>
+        </a:effectStyle>
+        <a:effectStyle>
+          <a:effectLst>
+            <a:outerShdw blurRad="57150" dist="19050" dir="5400000" algn="ctr" rotWithShape="0">
+              <a:srgbClr val="000000">
+                <a:alpha val="63000"/>
+              </a:srgbClr>
+            </a:outerShdw>
+          </a:effectLst>
+        </a:effectStyle>
+      </a:effectStyleLst>
+      <a:bgFillStyleLst>
+        <a:solidFill>
+          <a:schemeClr val="phClr"/>
+        </a:solidFill>
+        <a:solidFill>
+          <a:schemeClr val="phClr">
+            <a:tint val="95000"/>
+            <a:satMod val="170000"/>
+          </a:schemeClr>
+        </a:solidFill>
+        <a:gradFill rotWithShape="1">
+          <a:gsLst>
+            <a:gs pos="0">
+              <a:schemeClr val="phClr">
+                <a:tint val="93000"/>
+                <a:satMod val="150000"/>
+                <a:shade val="98000"/>
+                <a:lumMod val="102000"/>
+              </a:schemeClr>
+            </a:gs>
+            <a:gs pos="50000">
+              <a:schemeClr val="phClr">
+                <a:tint val="98000"/>
+                <a:satMod val="130000"/>
+                <a:shade val="90000"/>
+                <a:lumMod val="103000"/>
+              </a:schemeClr>
+            </a:gs>
+            <a:gs pos="100000">
+              <a:schemeClr val="phClr">
+                <a:shade val="63000"/>
+                <a:satMod val="120000"/>
+              </a:schemeClr>
+            </a:gs>
+          </a:gsLst>
+          <a:lin ang="5400000" scaled="0"/>
+        </a:gradFill>
+      </a:bgFillStyleLst>
+    </a:fmtScheme>
+  </a:themeElements>
+  <a:objectDefaults>
+    <a:lnDef>
+      <a:spPr/>
+      <a:bodyPr/>
+      <a:lstStyle/>
+      <a:style>
+        <a:lnRef idx="2">
+          <a:schemeClr val="accent1"/>
+        </a:lnRef>
+        <a:fillRef idx="0">
+          <a:schemeClr val="accent1"/>
+        </a:fillRef>
+        <a:effectRef idx="1">
+          <a:schemeClr val="accent1"/>
+        </a:effectRef>
+        <a:fontRef idx="minor">
+          <a:schemeClr val="tx1"/>
+        </a:fontRef>
+      </a:style>
+    </a:lnDef>
+  </a:objectDefaults>
+  <a:extraClrSchemeLst/>
+  <a:extLst>
+    <a:ext uri="{05A4C25C-085E-4340-85A3-A5531E510DB2}">
+      <thm15:themeFamily xmlns:thm15="http://schemas.microsoft.com/office/thememl/2012/main" name="Office Theme" id="{2E142A2C-CD16-42D6-873A-C26D2A0506FA}" vid="{1BDDFF52-6CD6-40A5-AB3C-68EB2F1E4D0A}"/>
+    </a:ext>
+  </a:extLst>
+</a:theme>
 </file>